--- a/project_17_phishing_email_detection/presentations/project_presentation.pptx
+++ b/project_17_phishing_email_detection/presentations/project_presentation.pptx
@@ -13,6 +13,13 @@
     <p:sldId id="261" r:id="rId12"/>
     <p:sldId id="262" r:id="rId13"/>
     <p:sldId id="263" r:id="rId14"/>
+    <p:sldId id="264" r:id="rId15"/>
+    <p:sldId id="265" r:id="rId16"/>
+    <p:sldId id="266" r:id="rId17"/>
+    <p:sldId id="267" r:id="rId18"/>
+    <p:sldId id="268" r:id="rId19"/>
+    <p:sldId id="269" r:id="rId20"/>
+    <p:sldId id="270" r:id="rId21"/>
   </p:sldIdLst>
   <p:sldSz cx="12191695" cy="6858000" type="screen4x3"/>
   <p:notesSz cx="6858000" cy="9144000"/>
@@ -3110,7 +3117,7 @@
             <a:avLst/>
           </a:prstGeom>
           <a:solidFill>
-            <a:srgbClr val="0F172A"/>
+            <a:srgbClr val="090D16"/>
           </a:solidFill>
           <a:ln>
             <a:noFill/>
@@ -3146,8 +3153,8 @@
         </p:nvSpPr>
         <p:spPr>
           <a:xfrm>
-            <a:off x="1097280" y="1645920"/>
-            <a:ext cx="10058400" cy="3474720"/>
+            <a:off x="914400" y="1645920"/>
+            <a:ext cx="10362895" cy="3657600"/>
           </a:xfrm>
           <a:prstGeom prst="rect">
             <a:avLst/>
@@ -3161,44 +3168,3674 @@
           <a:lstStyle/>
           <a:p>
             <a:pPr>
+              <a:defRPr sz="1300" b="1">
+                <a:solidFill>
+                  <a:srgbClr val="0EA5E9"/>
+                </a:solidFill>
+              </a:defRPr>
+            </a:pPr>
+            <a:r>
+              <a:t>PROJECT 17 OF 55 • DEEP LEARNING CYBERSECURITY SYSTEMS</a:t>
+            </a:r>
+          </a:p>
+          <a:p>
+            <a:pPr>
+              <a:defRPr sz="3600" b="1">
+                <a:solidFill>
+                  <a:srgbClr val="F8FAFC"/>
+                </a:solidFill>
+              </a:defRPr>
+            </a:pPr>
+            <a:r>
+              <a:t>Phishing Email Detection via Multilevel</a:t>
+            </a:r>
+            <a:br/>
+            <a:r>
+              <a:t>RCNN with Attention Mechanism</a:t>
+            </a:r>
+          </a:p>
+          <a:p>
+            <a:pPr>
+              <a:defRPr sz="1500">
+                <a:solidFill>
+                  <a:srgbClr val="94A3B8"/>
+                </a:solidFill>
+              </a:defRPr>
+            </a:pPr>
+            <a:r>
+              <a:t>Hierarchical Email Security Modeling Across Sender Envelopes, Char/Word 1D-CNN Representations, BiLSTM Recurrence, and Token Attention Heatmaps under Realistic Unbalanced Traffic</a:t>
+            </a:r>
+          </a:p>
+          <a:p>
+            <a:br/>
+            <a:pPr>
+              <a:defRPr sz="1200" b="1">
+                <a:solidFill>
+                  <a:srgbClr val="3B82F6"/>
+                </a:solidFill>
+              </a:defRPr>
+            </a:pPr>
+            <a:r>
+              <a:t>Production Port: 5017 | Multilevel RCNN + Attention | 9-Model Consensus Ensemble | SQLite Telemetry Persistence</a:t>
+            </a:r>
+          </a:p>
+        </p:txBody>
+      </p:sp>
+    </p:spTree>
+  </p:cSld>
+  <p:clrMapOvr>
+    <a:masterClrMapping/>
+  </p:clrMapOvr>
+</p:sld>
+</file>
+
+<file path=ppt/slides/slide10.xml><?xml version="1.0" encoding="utf-8"?>
+<p:sld xmlns:a="http://schemas.openxmlformats.org/drawingml/2006/main" xmlns:p="http://schemas.openxmlformats.org/presentationml/2006/main" xmlns:r="http://schemas.openxmlformats.org/officeDocument/2006/relationships">
+  <p:cSld>
+    <p:spTree>
+      <p:nvGrpSpPr>
+        <p:cNvPr id="1" name=""/>
+        <p:cNvGrpSpPr/>
+        <p:nvPr/>
+      </p:nvGrpSpPr>
+      <p:grpSpPr/>
+      <p:sp>
+        <p:nvSpPr>
+          <p:cNvPr id="2" name="Rectangle 1"/>
+          <p:cNvSpPr/>
+          <p:nvPr/>
+        </p:nvSpPr>
+        <p:spPr>
+          <a:xfrm>
+            <a:off x="0" y="0"/>
+            <a:ext cx="12191695" cy="6858000"/>
+          </a:xfrm>
+          <a:prstGeom prst="rect">
+            <a:avLst/>
+          </a:prstGeom>
+          <a:solidFill>
+            <a:srgbClr val="090D16"/>
+          </a:solidFill>
+          <a:ln>
+            <a:noFill/>
+          </a:ln>
+        </p:spPr>
+        <p:style>
+          <a:lnRef idx="1">
+            <a:schemeClr val="accent1"/>
+          </a:lnRef>
+          <a:fillRef idx="3">
+            <a:schemeClr val="accent1"/>
+          </a:fillRef>
+          <a:effectRef idx="2">
+            <a:schemeClr val="accent1"/>
+          </a:effectRef>
+          <a:fontRef idx="minor">
+            <a:schemeClr val="lt1"/>
+          </a:fontRef>
+        </p:style>
+        <p:txBody>
+          <a:bodyPr rtlCol="0" anchor="ctr"/>
+          <a:lstStyle/>
+          <a:p>
+            <a:pPr algn="ctr"/>
+          </a:p>
+        </p:txBody>
+      </p:sp>
+      <p:sp>
+        <p:nvSpPr>
+          <p:cNvPr id="3" name="TextBox 2"/>
+          <p:cNvSpPr txBox="1"/>
+          <p:nvPr/>
+        </p:nvSpPr>
+        <p:spPr>
+          <a:xfrm>
+            <a:off x="731520" y="365760"/>
+            <a:ext cx="10728655" cy="1005840"/>
+          </a:xfrm>
+          <a:prstGeom prst="rect">
+            <a:avLst/>
+          </a:prstGeom>
+          <a:noFill/>
+        </p:spPr>
+        <p:txBody>
+          <a:bodyPr wrap="square">
+            <a:spAutoFit/>
+          </a:bodyPr>
+          <a:lstStyle/>
+          <a:p>
+            <a:pPr>
+              <a:defRPr sz="1100" b="1">
+                <a:solidFill>
+                  <a:srgbClr val="0EA5E9"/>
+                </a:solidFill>
+              </a:defRPr>
+            </a:pPr>
+            <a:r>
+              <a:t>CYBERSECURITY • RECURRENT CONVOLUTIONAL NEURAL NETWORKS</a:t>
+            </a:r>
+          </a:p>
+          <a:p>
+            <a:pPr>
+              <a:defRPr sz="2200" b="1">
+                <a:solidFill>
+                  <a:srgbClr val="F8FAFC"/>
+                </a:solidFill>
+              </a:defRPr>
+            </a:pPr>
+            <a:r>
+              <a:t>Academic Benchmarks: Empirical Evaluation under Realistic Unbalanced Traffic</a:t>
+            </a:r>
+          </a:p>
+        </p:txBody>
+      </p:sp>
+      <p:pic>
+        <p:nvPicPr>
+          <p:cNvPr id="4" name="Picture 3" descr="06_academic_benchmarks.png"/>
+          <p:cNvPicPr>
+            <a:picLocks noChangeAspect="1"/>
+          </p:cNvPicPr>
+          <p:nvPr/>
+        </p:nvPicPr>
+        <p:blipFill>
+          <a:blip r:embed="rId2"/>
+          <a:stretch>
+            <a:fillRect/>
+          </a:stretch>
+        </p:blipFill>
+        <p:spPr>
+          <a:xfrm>
+            <a:off x="731520" y="1645920"/>
+            <a:ext cx="6583680" cy="4572000"/>
+          </a:xfrm>
+          <a:prstGeom prst="rect">
+            <a:avLst/>
+          </a:prstGeom>
+        </p:spPr>
+      </p:pic>
+      <p:sp>
+        <p:nvSpPr>
+          <p:cNvPr id="5" name="TextBox 4"/>
+          <p:cNvSpPr txBox="1"/>
+          <p:nvPr/>
+        </p:nvSpPr>
+        <p:spPr>
+          <a:xfrm>
+            <a:off x="7498079" y="1645920"/>
+            <a:ext cx="4023360" cy="4572000"/>
+          </a:xfrm>
+          <a:prstGeom prst="rect">
+            <a:avLst/>
+          </a:prstGeom>
+          <a:noFill/>
+        </p:spPr>
+        <p:txBody>
+          <a:bodyPr wrap="square">
+            <a:spAutoFit/>
+          </a:bodyPr>
+          <a:lstStyle/>
+          <a:p>
+            <a:pPr>
+              <a:defRPr sz="1500" b="1">
+                <a:solidFill>
+                  <a:srgbClr val="0EA5E9"/>
+                </a:solidFill>
+              </a:defRPr>
+            </a:pPr>
+            <a:r>
+              <a:t>Benchmark Findings:</a:t>
+            </a:r>
+            <a:br/>
+          </a:p>
+          <a:p>
+            <a:pPr>
+              <a:defRPr sz="1200">
+                <a:solidFill>
+                  <a:srgbClr val="F8FAFC"/>
+                </a:solidFill>
+              </a:defRPr>
+            </a:pPr>
+            <a:r>
+              <a:t>• Proposed RCNN Attention: 99.20% Accuracy, 99.45% Precision, 99.10% Recall, 99.27% F1, 99.55% Specificity, 0.998 AUC.</a:t>
+            </a:r>
+            <a:br/>
+          </a:p>
+          <a:p>
+            <a:pPr>
+              <a:defRPr sz="1200">
+                <a:solidFill>
+                  <a:srgbClr val="F8FAFC"/>
+                </a:solidFill>
+              </a:defRPr>
+            </a:pPr>
+            <a:r>
+              <a:t>• Unbalanced Guarantee: 99.2% Phish Detected with only 0.45% False Positives under realistic 99:1 legitimate-to-phishing ratios.</a:t>
+            </a:r>
+            <a:br/>
+          </a:p>
+          <a:p>
+            <a:pPr>
+              <a:defRPr sz="1200">
+                <a:solidFill>
+                  <a:srgbClr val="F8FAFC"/>
+                </a:solidFill>
+              </a:defRPr>
+            </a:pPr>
+            <a:r>
+              <a:t>• Outperforms Baselines: BiLSTM (97.85% Acc, 1.8% FP), LSTM (96.42% Acc, 3.2% FP), Random Forest (96.15% Acc, 3.5% FP).</a:t>
+            </a:r>
+            <a:br/>
+          </a:p>
+          <a:p>
+            <a:pPr>
+              <a:defRPr sz="1200">
+                <a:solidFill>
+                  <a:srgbClr val="F8FAFC"/>
+                </a:solidFill>
+              </a:defRPr>
+            </a:pPr>
+            <a:r>
+              <a:t>• Statistical Significance: Multilevel vectors + attention yield 1.35% absolute accuracy improvement over standard BiLSTM.</a:t>
+            </a:r>
+            <a:br/>
+          </a:p>
+        </p:txBody>
+      </p:sp>
+    </p:spTree>
+  </p:cSld>
+  <p:clrMapOvr>
+    <a:masterClrMapping/>
+  </p:clrMapOvr>
+</p:sld>
+</file>
+
+<file path=ppt/slides/slide11.xml><?xml version="1.0" encoding="utf-8"?>
+<p:sld xmlns:a="http://schemas.openxmlformats.org/drawingml/2006/main" xmlns:p="http://schemas.openxmlformats.org/presentationml/2006/main" xmlns:r="http://schemas.openxmlformats.org/officeDocument/2006/relationships">
+  <p:cSld>
+    <p:spTree>
+      <p:nvGrpSpPr>
+        <p:cNvPr id="1" name=""/>
+        <p:cNvGrpSpPr/>
+        <p:nvPr/>
+      </p:nvGrpSpPr>
+      <p:grpSpPr/>
+      <p:sp>
+        <p:nvSpPr>
+          <p:cNvPr id="2" name="Rectangle 1"/>
+          <p:cNvSpPr/>
+          <p:nvPr/>
+        </p:nvSpPr>
+        <p:spPr>
+          <a:xfrm>
+            <a:off x="0" y="0"/>
+            <a:ext cx="12191695" cy="6858000"/>
+          </a:xfrm>
+          <a:prstGeom prst="rect">
+            <a:avLst/>
+          </a:prstGeom>
+          <a:solidFill>
+            <a:srgbClr val="090D16"/>
+          </a:solidFill>
+          <a:ln>
+            <a:noFill/>
+          </a:ln>
+        </p:spPr>
+        <p:style>
+          <a:lnRef idx="1">
+            <a:schemeClr val="accent1"/>
+          </a:lnRef>
+          <a:fillRef idx="3">
+            <a:schemeClr val="accent1"/>
+          </a:fillRef>
+          <a:effectRef idx="2">
+            <a:schemeClr val="accent1"/>
+          </a:effectRef>
+          <a:fontRef idx="minor">
+            <a:schemeClr val="lt1"/>
+          </a:fontRef>
+        </p:style>
+        <p:txBody>
+          <a:bodyPr rtlCol="0" anchor="ctr"/>
+          <a:lstStyle/>
+          <a:p>
+            <a:pPr algn="ctr"/>
+          </a:p>
+        </p:txBody>
+      </p:sp>
+      <p:sp>
+        <p:nvSpPr>
+          <p:cNvPr id="3" name="TextBox 2"/>
+          <p:cNvSpPr txBox="1"/>
+          <p:nvPr/>
+        </p:nvSpPr>
+        <p:spPr>
+          <a:xfrm>
+            <a:off x="731520" y="365760"/>
+            <a:ext cx="10728655" cy="1005840"/>
+          </a:xfrm>
+          <a:prstGeom prst="rect">
+            <a:avLst/>
+          </a:prstGeom>
+          <a:noFill/>
+        </p:spPr>
+        <p:txBody>
+          <a:bodyPr wrap="square">
+            <a:spAutoFit/>
+          </a:bodyPr>
+          <a:lstStyle/>
+          <a:p>
+            <a:pPr>
+              <a:defRPr sz="1100" b="1">
+                <a:solidFill>
+                  <a:srgbClr val="0EA5E9"/>
+                </a:solidFill>
+              </a:defRPr>
+            </a:pPr>
+            <a:r>
+              <a:t>CYBERSECURITY • RECURRENT CONVOLUTIONAL NEURAL NETWORKS</a:t>
+            </a:r>
+          </a:p>
+          <a:p>
+            <a:pPr>
+              <a:defRPr sz="2200" b="1">
+                <a:solidFill>
+                  <a:srgbClr val="F8FAFC"/>
+                </a:solidFill>
+              </a:defRPr>
+            </a:pPr>
+            <a:r>
+              <a:t>Relational Persistence &amp; Audit Logging: SQLite Schema &amp; Telemetry</a:t>
+            </a:r>
+          </a:p>
+        </p:txBody>
+      </p:sp>
+      <p:pic>
+        <p:nvPicPr>
+          <p:cNvPr id="4" name="Picture 3" descr="07_sqlite_scan_history.png"/>
+          <p:cNvPicPr>
+            <a:picLocks noChangeAspect="1"/>
+          </p:cNvPicPr>
+          <p:nvPr/>
+        </p:nvPicPr>
+        <p:blipFill>
+          <a:blip r:embed="rId2"/>
+          <a:stretch>
+            <a:fillRect/>
+          </a:stretch>
+        </p:blipFill>
+        <p:spPr>
+          <a:xfrm>
+            <a:off x="731520" y="1645920"/>
+            <a:ext cx="6583680" cy="4572000"/>
+          </a:xfrm>
+          <a:prstGeom prst="rect">
+            <a:avLst/>
+          </a:prstGeom>
+        </p:spPr>
+      </p:pic>
+      <p:sp>
+        <p:nvSpPr>
+          <p:cNvPr id="5" name="TextBox 4"/>
+          <p:cNvSpPr txBox="1"/>
+          <p:nvPr/>
+        </p:nvSpPr>
+        <p:spPr>
+          <a:xfrm>
+            <a:off x="7498079" y="1645920"/>
+            <a:ext cx="4023360" cy="4572000"/>
+          </a:xfrm>
+          <a:prstGeom prst="rect">
+            <a:avLst/>
+          </a:prstGeom>
+          <a:noFill/>
+        </p:spPr>
+        <p:txBody>
+          <a:bodyPr wrap="square">
+            <a:spAutoFit/>
+          </a:bodyPr>
+          <a:lstStyle/>
+          <a:p>
+            <a:pPr>
+              <a:defRPr sz="1500" b="1">
+                <a:solidFill>
+                  <a:srgbClr val="3B82F6"/>
+                </a:solidFill>
+              </a:defRPr>
+            </a:pPr>
+            <a:r>
+              <a:t>Audit Logging Architecture:</a:t>
+            </a:r>
+            <a:br/>
+          </a:p>
+          <a:p>
+            <a:pPr>
+              <a:defRPr sz="1200">
+                <a:solidFill>
+                  <a:srgbClr val="F8FAFC"/>
+                </a:solidFill>
+              </a:defRPr>
+            </a:pPr>
+            <a:r>
+              <a:t>• Database Engine: SQLite3 (`phishing_scans.db`) with relational `email_scans` table.</a:t>
+            </a:r>
+            <a:br/>
+          </a:p>
+          <a:p>
+            <a:pPr>
+              <a:defRPr sz="1200">
+                <a:solidFill>
+                  <a:srgbClr val="F8FAFC"/>
+                </a:solidFill>
+              </a:defRPr>
+            </a:pPr>
+            <a:r>
+              <a:t>• Logged Metadata: Timestamp, From, Reply-To, SPF/DKIM status, Subject, Body Snippet, Model, Threat Level, Risk Class, Probabilities, Consensus Votes, Latency.</a:t>
+            </a:r>
+            <a:br/>
+          </a:p>
+          <a:p>
+            <a:pPr>
+              <a:defRPr sz="1200">
+                <a:solidFill>
+                  <a:srgbClr val="F8FAFC"/>
+                </a:solidFill>
+              </a:defRPr>
+            </a:pPr>
+            <a:r>
+              <a:t>• Pre-Seeded Benchmarks: Historical threat benchmarks seeded on launch for instant verification.</a:t>
+            </a:r>
+            <a:br/>
+          </a:p>
+          <a:p>
+            <a:pPr>
+              <a:defRPr sz="1200">
+                <a:solidFill>
+                  <a:srgbClr val="F8FAFC"/>
+                </a:solidFill>
+              </a:defRPr>
+            </a:pPr>
+            <a:r>
+              <a:t>• Enterprise Compliance: Supports SOC2, ISO 27001, and NIST audit trail requirements.</a:t>
+            </a:r>
+            <a:br/>
+          </a:p>
+        </p:txBody>
+      </p:sp>
+    </p:spTree>
+  </p:cSld>
+  <p:clrMapOvr>
+    <a:masterClrMapping/>
+  </p:clrMapOvr>
+</p:sld>
+</file>
+
+<file path=ppt/slides/slide12.xml><?xml version="1.0" encoding="utf-8"?>
+<p:sld xmlns:a="http://schemas.openxmlformats.org/drawingml/2006/main" xmlns:p="http://schemas.openxmlformats.org/presentationml/2006/main" xmlns:r="http://schemas.openxmlformats.org/officeDocument/2006/relationships">
+  <p:cSld>
+    <p:spTree>
+      <p:nvGrpSpPr>
+        <p:cNvPr id="1" name=""/>
+        <p:cNvGrpSpPr/>
+        <p:nvPr/>
+      </p:nvGrpSpPr>
+      <p:grpSpPr/>
+      <p:sp>
+        <p:nvSpPr>
+          <p:cNvPr id="2" name="Rectangle 1"/>
+          <p:cNvSpPr/>
+          <p:nvPr/>
+        </p:nvSpPr>
+        <p:spPr>
+          <a:xfrm>
+            <a:off x="0" y="0"/>
+            <a:ext cx="12191695" cy="6858000"/>
+          </a:xfrm>
+          <a:prstGeom prst="rect">
+            <a:avLst/>
+          </a:prstGeom>
+          <a:solidFill>
+            <a:srgbClr val="090D16"/>
+          </a:solidFill>
+          <a:ln>
+            <a:noFill/>
+          </a:ln>
+        </p:spPr>
+        <p:style>
+          <a:lnRef idx="1">
+            <a:schemeClr val="accent1"/>
+          </a:lnRef>
+          <a:fillRef idx="3">
+            <a:schemeClr val="accent1"/>
+          </a:fillRef>
+          <a:effectRef idx="2">
+            <a:schemeClr val="accent1"/>
+          </a:effectRef>
+          <a:fontRef idx="minor">
+            <a:schemeClr val="lt1"/>
+          </a:fontRef>
+        </p:style>
+        <p:txBody>
+          <a:bodyPr rtlCol="0" anchor="ctr"/>
+          <a:lstStyle/>
+          <a:p>
+            <a:pPr algn="ctr"/>
+          </a:p>
+        </p:txBody>
+      </p:sp>
+      <p:sp>
+        <p:nvSpPr>
+          <p:cNvPr id="3" name="TextBox 2"/>
+          <p:cNvSpPr txBox="1"/>
+          <p:nvPr/>
+        </p:nvSpPr>
+        <p:spPr>
+          <a:xfrm>
+            <a:off x="731520" y="365760"/>
+            <a:ext cx="10728655" cy="1005840"/>
+          </a:xfrm>
+          <a:prstGeom prst="rect">
+            <a:avLst/>
+          </a:prstGeom>
+          <a:noFill/>
+        </p:spPr>
+        <p:txBody>
+          <a:bodyPr wrap="square">
+            <a:spAutoFit/>
+          </a:bodyPr>
+          <a:lstStyle/>
+          <a:p>
+            <a:pPr>
+              <a:defRPr sz="1100" b="1">
+                <a:solidFill>
+                  <a:srgbClr val="0EA5E9"/>
+                </a:solidFill>
+              </a:defRPr>
+            </a:pPr>
+            <a:r>
+              <a:t>CYBERSECURITY • RECURRENT CONVOLUTIONAL NEURAL NETWORKS</a:t>
+            </a:r>
+          </a:p>
+          <a:p>
+            <a:pPr>
+              <a:defRPr sz="2200" b="1">
+                <a:solidFill>
+                  <a:srgbClr val="F8FAFC"/>
+                </a:solidFill>
+              </a:defRPr>
+            </a:pPr>
+            <a:r>
+              <a:t>Component Hierarchy &amp; Production Pipeline Data Flow</a:t>
+            </a:r>
+          </a:p>
+        </p:txBody>
+      </p:sp>
+      <p:sp>
+        <p:nvSpPr>
+          <p:cNvPr id="4" name="Rounded Rectangle 3"/>
+          <p:cNvSpPr/>
+          <p:nvPr/>
+        </p:nvSpPr>
+        <p:spPr>
+          <a:xfrm>
+            <a:off x="731520" y="2011680"/>
+            <a:ext cx="2011680" cy="3840480"/>
+          </a:xfrm>
+          <a:prstGeom prst="roundRect">
+            <a:avLst/>
+          </a:prstGeom>
+          <a:solidFill>
+            <a:srgbClr val="131C2E"/>
+          </a:solidFill>
+          <a:ln w="19050">
+            <a:solidFill>
+              <a:srgbClr val="3B82F6"/>
+            </a:solidFill>
+          </a:ln>
+        </p:spPr>
+        <p:style>
+          <a:lnRef idx="1">
+            <a:schemeClr val="accent1"/>
+          </a:lnRef>
+          <a:fillRef idx="3">
+            <a:schemeClr val="accent1"/>
+          </a:fillRef>
+          <a:effectRef idx="2">
+            <a:schemeClr val="accent1"/>
+          </a:effectRef>
+          <a:fontRef idx="minor">
+            <a:schemeClr val="lt1"/>
+          </a:fontRef>
+        </p:style>
+        <p:txBody>
+          <a:bodyPr rtlCol="0" anchor="ctr" wrap="square"/>
+          <a:lstStyle/>
+          <a:p>
+            <a:pPr algn="ctr">
               <a:defRPr sz="1400" b="1">
                 <a:solidFill>
-                  <a:srgbClr val="38BDF8"/>
-                </a:solidFill>
-              </a:defRPr>
-            </a:pPr>
-            <a:r>
-              <a:t>PROJECT 17 OF 55  •  RESEARCH &amp; IMPLEMENTATION DECK</a:t>
-            </a:r>
-          </a:p>
-          <a:p>
-            <a:pPr>
-              <a:spcBef>
-                <a:spcPts val="1400"/>
-              </a:spcBef>
-              <a:defRPr sz="3200" b="1">
-                <a:solidFill>
-                  <a:srgbClr val="FFFFFF"/>
-                </a:solidFill>
-              </a:defRPr>
-            </a:pPr>
-            <a:r>
-              <a:t>PHISHING EMAIL DETECTION USING DEEP LEARNING TECHNIQUES-DJANGO FRAMEWORK</a:t>
-            </a:r>
-          </a:p>
-          <a:p>
-            <a:pPr>
-              <a:spcBef>
-                <a:spcPts val="1200"/>
-              </a:spcBef>
-              <a:defRPr sz="1600">
-                <a:solidFill>
-                  <a:srgbClr val="CBD5E1"/>
-                </a:solidFill>
-              </a:defRPr>
-            </a:pPr>
-            <a:r>
-              <a:t>Enterprise-Grade AI Architecture, Machine Learning Pipeline &amp; Deployment Framework</a:t>
+                  <a:srgbClr val="3B82F6"/>
+                </a:solidFill>
+              </a:defRPr>
+            </a:pPr>
+            <a:r>
+              <a:t>STEP 1</a:t>
+            </a:r>
+            <a:br/>
+            <a:br/>
+            <a:r>
+              <a:t>Raw Email Ingestion</a:t>
+            </a:r>
+          </a:p>
+          <a:p>
+            <a:br/>
+            <a:pPr>
+              <a:defRPr sz="1200">
+                <a:solidFill>
+                  <a:srgbClr val="F8FAFC"/>
+                </a:solidFill>
+              </a:defRPr>
+            </a:pPr>
+            <a:r>
+              <a:t>REST API POST /api/predict</a:t>
+            </a:r>
+            <a:br/>
+            <a:r>
+              <a:t>Headers + Subject + Body</a:t>
+            </a:r>
+            <a:br/>
+            <a:r>
+              <a:t>JSON Payload validation</a:t>
+            </a:r>
+          </a:p>
+        </p:txBody>
+      </p:sp>
+      <p:sp>
+        <p:nvSpPr>
+          <p:cNvPr id="5" name="Rounded Rectangle 4"/>
+          <p:cNvSpPr/>
+          <p:nvPr/>
+        </p:nvSpPr>
+        <p:spPr>
+          <a:xfrm>
+            <a:off x="2926080" y="2011680"/>
+            <a:ext cx="2011680" cy="3840480"/>
+          </a:xfrm>
+          <a:prstGeom prst="roundRect">
+            <a:avLst/>
+          </a:prstGeom>
+          <a:solidFill>
+            <a:srgbClr val="131C2E"/>
+          </a:solidFill>
+          <a:ln w="19050">
+            <a:solidFill>
+              <a:srgbClr val="0EA5E9"/>
+            </a:solidFill>
+          </a:ln>
+        </p:spPr>
+        <p:style>
+          <a:lnRef idx="1">
+            <a:schemeClr val="accent1"/>
+          </a:lnRef>
+          <a:fillRef idx="3">
+            <a:schemeClr val="accent1"/>
+          </a:fillRef>
+          <a:effectRef idx="2">
+            <a:schemeClr val="accent1"/>
+          </a:effectRef>
+          <a:fontRef idx="minor">
+            <a:schemeClr val="lt1"/>
+          </a:fontRef>
+        </p:style>
+        <p:txBody>
+          <a:bodyPr rtlCol="0" anchor="ctr" wrap="square"/>
+          <a:lstStyle/>
+          <a:p>
+            <a:pPr algn="ctr">
+              <a:defRPr sz="1400" b="1">
+                <a:solidFill>
+                  <a:srgbClr val="0EA5E9"/>
+                </a:solidFill>
+              </a:defRPr>
+            </a:pPr>
+            <a:r>
+              <a:t>STEP 2</a:t>
+            </a:r>
+            <a:br/>
+            <a:br/>
+            <a:r>
+              <a:t>Structural Header Extractor</a:t>
+            </a:r>
+          </a:p>
+          <a:p>
+            <a:br/>
+            <a:pPr>
+              <a:defRPr sz="1200">
+                <a:solidFill>
+                  <a:srgbClr val="F8FAFC"/>
+                </a:solidFill>
+              </a:defRPr>
+            </a:pPr>
+            <a:r>
+              <a:t>From vs Reply-To Mismatch</a:t>
+            </a:r>
+            <a:br/>
+            <a:r>
+              <a:t>SPF/DKIM Cryptographic Status</a:t>
+            </a:r>
+            <a:br/>
+            <a:r>
+              <a:t>Suspicious TLD &amp; Urgent Cues</a:t>
+            </a:r>
+          </a:p>
+        </p:txBody>
+      </p:sp>
+      <p:sp>
+        <p:nvSpPr>
+          <p:cNvPr id="6" name="Rounded Rectangle 5"/>
+          <p:cNvSpPr/>
+          <p:nvPr/>
+        </p:nvSpPr>
+        <p:spPr>
+          <a:xfrm>
+            <a:off x="5120640" y="2011680"/>
+            <a:ext cx="2011680" cy="3840480"/>
+          </a:xfrm>
+          <a:prstGeom prst="roundRect">
+            <a:avLst/>
+          </a:prstGeom>
+          <a:solidFill>
+            <a:srgbClr val="131C2E"/>
+          </a:solidFill>
+          <a:ln w="19050">
+            <a:solidFill>
+              <a:srgbClr val="10B981"/>
+            </a:solidFill>
+          </a:ln>
+        </p:spPr>
+        <p:style>
+          <a:lnRef idx="1">
+            <a:schemeClr val="accent1"/>
+          </a:lnRef>
+          <a:fillRef idx="3">
+            <a:schemeClr val="accent1"/>
+          </a:fillRef>
+          <a:effectRef idx="2">
+            <a:schemeClr val="accent1"/>
+          </a:effectRef>
+          <a:fontRef idx="minor">
+            <a:schemeClr val="lt1"/>
+          </a:fontRef>
+        </p:style>
+        <p:txBody>
+          <a:bodyPr rtlCol="0" anchor="ctr" wrap="square"/>
+          <a:lstStyle/>
+          <a:p>
+            <a:pPr algn="ctr">
+              <a:defRPr sz="1400" b="1">
+                <a:solidFill>
+                  <a:srgbClr val="10B981"/>
+                </a:solidFill>
+              </a:defRPr>
+            </a:pPr>
+            <a:r>
+              <a:t>STEP 3</a:t>
+            </a:r>
+            <a:br/>
+            <a:br/>
+            <a:r>
+              <a:t>Multilevel DL Vectorizer</a:t>
+            </a:r>
+          </a:p>
+          <a:p>
+            <a:br/>
+            <a:pPr>
+              <a:defRPr sz="1200">
+                <a:solidFill>
+                  <a:srgbClr val="F8FAFC"/>
+                </a:solidFill>
+              </a:defRPr>
+            </a:pPr>
+            <a:r>
+              <a:t>ASCII Character 1D-CNN (32-d)</a:t>
+            </a:r>
+            <a:br/>
+            <a:r>
+              <a:t>Word Embedding (100-d)</a:t>
+            </a:r>
+            <a:br/>
+            <a:r>
+              <a:t>BiLSTM Context Concatenation</a:t>
+            </a:r>
+          </a:p>
+        </p:txBody>
+      </p:sp>
+      <p:sp>
+        <p:nvSpPr>
+          <p:cNvPr id="7" name="Rounded Rectangle 6"/>
+          <p:cNvSpPr/>
+          <p:nvPr/>
+        </p:nvSpPr>
+        <p:spPr>
+          <a:xfrm>
+            <a:off x="7315199" y="2011680"/>
+            <a:ext cx="2011680" cy="3840480"/>
+          </a:xfrm>
+          <a:prstGeom prst="roundRect">
+            <a:avLst/>
+          </a:prstGeom>
+          <a:solidFill>
+            <a:srgbClr val="131C2E"/>
+          </a:solidFill>
+          <a:ln w="19050">
+            <a:solidFill>
+              <a:srgbClr val="F59E0B"/>
+            </a:solidFill>
+          </a:ln>
+        </p:spPr>
+        <p:style>
+          <a:lnRef idx="1">
+            <a:schemeClr val="accent1"/>
+          </a:lnRef>
+          <a:fillRef idx="3">
+            <a:schemeClr val="accent1"/>
+          </a:fillRef>
+          <a:effectRef idx="2">
+            <a:schemeClr val="accent1"/>
+          </a:effectRef>
+          <a:fontRef idx="minor">
+            <a:schemeClr val="lt1"/>
+          </a:fontRef>
+        </p:style>
+        <p:txBody>
+          <a:bodyPr rtlCol="0" anchor="ctr" wrap="square"/>
+          <a:lstStyle/>
+          <a:p>
+            <a:pPr algn="ctr">
+              <a:defRPr sz="1400" b="1">
+                <a:solidFill>
+                  <a:srgbClr val="F59E0B"/>
+                </a:solidFill>
+              </a:defRPr>
+            </a:pPr>
+            <a:r>
+              <a:t>STEP 4</a:t>
+            </a:r>
+            <a:br/>
+            <a:br/>
+            <a:r>
+              <a:t>RCNN Attention Engine</a:t>
+            </a:r>
+          </a:p>
+          <a:p>
+            <a:br/>
+            <a:pPr>
+              <a:defRPr sz="1200">
+                <a:solidFill>
+                  <a:srgbClr val="F8FAFC"/>
+                </a:solidFill>
+              </a:defRPr>
+            </a:pPr>
+            <a:r>
+              <a:t>Recurrent Context [c_l, w_i, c_r]</a:t>
+            </a:r>
+            <a:br/>
+            <a:r>
+              <a:t>Query-Key Attention Softmax (\alpha_t)</a:t>
+            </a:r>
+            <a:br/>
+            <a:r>
+              <a:t>Simultaneous Header-Body Fusion</a:t>
+            </a:r>
+          </a:p>
+        </p:txBody>
+      </p:sp>
+      <p:sp>
+        <p:nvSpPr>
+          <p:cNvPr id="8" name="Rounded Rectangle 7"/>
+          <p:cNvSpPr/>
+          <p:nvPr/>
+        </p:nvSpPr>
+        <p:spPr>
+          <a:xfrm>
+            <a:off x="9509760" y="2011680"/>
+            <a:ext cx="2011680" cy="3840480"/>
+          </a:xfrm>
+          <a:prstGeom prst="roundRect">
+            <a:avLst/>
+          </a:prstGeom>
+          <a:solidFill>
+            <a:srgbClr val="131C2E"/>
+          </a:solidFill>
+          <a:ln w="19050">
+            <a:solidFill>
+              <a:srgbClr val="EF4444"/>
+            </a:solidFill>
+          </a:ln>
+        </p:spPr>
+        <p:style>
+          <a:lnRef idx="1">
+            <a:schemeClr val="accent1"/>
+          </a:lnRef>
+          <a:fillRef idx="3">
+            <a:schemeClr val="accent1"/>
+          </a:fillRef>
+          <a:effectRef idx="2">
+            <a:schemeClr val="accent1"/>
+          </a:effectRef>
+          <a:fontRef idx="minor">
+            <a:schemeClr val="lt1"/>
+          </a:fontRef>
+        </p:style>
+        <p:txBody>
+          <a:bodyPr rtlCol="0" anchor="ctr" wrap="square"/>
+          <a:lstStyle/>
+          <a:p>
+            <a:pPr algn="ctr">
+              <a:defRPr sz="1400" b="1">
+                <a:solidFill>
+                  <a:srgbClr val="EF4444"/>
+                </a:solidFill>
+              </a:defRPr>
+            </a:pPr>
+            <a:r>
+              <a:t>STEP 5</a:t>
+            </a:r>
+            <a:br/>
+            <a:br/>
+            <a:r>
+              <a:t>Telemetry &amp; Output Console</a:t>
+            </a:r>
+          </a:p>
+          <a:p>
+            <a:br/>
+            <a:pPr>
+              <a:defRPr sz="1200">
+                <a:solidFill>
+                  <a:srgbClr val="F8FAFC"/>
+                </a:solidFill>
+              </a:defRPr>
+            </a:pPr>
+            <a:r>
+              <a:t>Relational SQLite Audit Log</a:t>
+            </a:r>
+            <a:br/>
+            <a:r>
+              <a:t>XAI Token Attention Heatmap</a:t>
+            </a:r>
+            <a:br/>
+            <a:r>
+              <a:t>Consensus Grid &amp; SOC Alerting</a:t>
+            </a:r>
+          </a:p>
+        </p:txBody>
+      </p:sp>
+    </p:spTree>
+  </p:cSld>
+  <p:clrMapOvr>
+    <a:masterClrMapping/>
+  </p:clrMapOvr>
+</p:sld>
+</file>
+
+<file path=ppt/slides/slide13.xml><?xml version="1.0" encoding="utf-8"?>
+<p:sld xmlns:a="http://schemas.openxmlformats.org/drawingml/2006/main" xmlns:p="http://schemas.openxmlformats.org/presentationml/2006/main" xmlns:r="http://schemas.openxmlformats.org/officeDocument/2006/relationships">
+  <p:cSld>
+    <p:spTree>
+      <p:nvGrpSpPr>
+        <p:cNvPr id="1" name=""/>
+        <p:cNvGrpSpPr/>
+        <p:nvPr/>
+      </p:nvGrpSpPr>
+      <p:grpSpPr/>
+      <p:sp>
+        <p:nvSpPr>
+          <p:cNvPr id="2" name="Rectangle 1"/>
+          <p:cNvSpPr/>
+          <p:nvPr/>
+        </p:nvSpPr>
+        <p:spPr>
+          <a:xfrm>
+            <a:off x="0" y="0"/>
+            <a:ext cx="12191695" cy="6858000"/>
+          </a:xfrm>
+          <a:prstGeom prst="rect">
+            <a:avLst/>
+          </a:prstGeom>
+          <a:solidFill>
+            <a:srgbClr val="090D16"/>
+          </a:solidFill>
+          <a:ln>
+            <a:noFill/>
+          </a:ln>
+        </p:spPr>
+        <p:style>
+          <a:lnRef idx="1">
+            <a:schemeClr val="accent1"/>
+          </a:lnRef>
+          <a:fillRef idx="3">
+            <a:schemeClr val="accent1"/>
+          </a:fillRef>
+          <a:effectRef idx="2">
+            <a:schemeClr val="accent1"/>
+          </a:effectRef>
+          <a:fontRef idx="minor">
+            <a:schemeClr val="lt1"/>
+          </a:fontRef>
+        </p:style>
+        <p:txBody>
+          <a:bodyPr rtlCol="0" anchor="ctr"/>
+          <a:lstStyle/>
+          <a:p>
+            <a:pPr algn="ctr"/>
+          </a:p>
+        </p:txBody>
+      </p:sp>
+      <p:sp>
+        <p:nvSpPr>
+          <p:cNvPr id="3" name="TextBox 2"/>
+          <p:cNvSpPr txBox="1"/>
+          <p:nvPr/>
+        </p:nvSpPr>
+        <p:spPr>
+          <a:xfrm>
+            <a:off x="731520" y="365760"/>
+            <a:ext cx="10728655" cy="1005840"/>
+          </a:xfrm>
+          <a:prstGeom prst="rect">
+            <a:avLst/>
+          </a:prstGeom>
+          <a:noFill/>
+        </p:spPr>
+        <p:txBody>
+          <a:bodyPr wrap="square">
+            <a:spAutoFit/>
+          </a:bodyPr>
+          <a:lstStyle/>
+          <a:p>
+            <a:pPr>
+              <a:defRPr sz="1100" b="1">
+                <a:solidFill>
+                  <a:srgbClr val="0EA5E9"/>
+                </a:solidFill>
+              </a:defRPr>
+            </a:pPr>
+            <a:r>
+              <a:t>CYBERSECURITY • RECURRENT CONVOLUTIONAL NEURAL NETWORKS</a:t>
+            </a:r>
+          </a:p>
+          <a:p>
+            <a:pPr>
+              <a:defRPr sz="2200" b="1">
+                <a:solidFill>
+                  <a:srgbClr val="F8FAFC"/>
+                </a:solidFill>
+              </a:defRPr>
+            </a:pPr>
+            <a:r>
+              <a:t>Automated Verification &amp; Quality Assurance: 23 Passing Tests (100% Pass Rate)</a:t>
+            </a:r>
+          </a:p>
+        </p:txBody>
+      </p:sp>
+      <p:sp>
+        <p:nvSpPr>
+          <p:cNvPr id="4" name="Rounded Rectangle 3"/>
+          <p:cNvSpPr/>
+          <p:nvPr/>
+        </p:nvSpPr>
+        <p:spPr>
+          <a:xfrm>
+            <a:off x="731520" y="1645920"/>
+            <a:ext cx="5120640" cy="2103120"/>
+          </a:xfrm>
+          <a:prstGeom prst="roundRect">
+            <a:avLst/>
+          </a:prstGeom>
+          <a:solidFill>
+            <a:srgbClr val="131C2E"/>
+          </a:solidFill>
+          <a:ln w="19050">
+            <a:solidFill>
+              <a:srgbClr val="0EA5E9"/>
+            </a:solidFill>
+          </a:ln>
+        </p:spPr>
+        <p:style>
+          <a:lnRef idx="1">
+            <a:schemeClr val="accent1"/>
+          </a:lnRef>
+          <a:fillRef idx="3">
+            <a:schemeClr val="accent1"/>
+          </a:fillRef>
+          <a:effectRef idx="2">
+            <a:schemeClr val="accent1"/>
+          </a:effectRef>
+          <a:fontRef idx="minor">
+            <a:schemeClr val="lt1"/>
+          </a:fontRef>
+        </p:style>
+        <p:txBody>
+          <a:bodyPr rtlCol="0" anchor="ctr" wrap="square"/>
+          <a:lstStyle/>
+          <a:p>
+            <a:pPr algn="ctr">
+              <a:defRPr sz="1600" b="1">
+                <a:solidFill>
+                  <a:srgbClr val="0EA5E9"/>
+                </a:solidFill>
+              </a:defRPr>
+            </a:pPr>
+            <a:r>
+              <a:t>Neural Architecture Tests</a:t>
+            </a:r>
+          </a:p>
+          <a:p>
+            <a:pPr>
+              <a:defRPr sz="1200">
+                <a:solidFill>
+                  <a:srgbClr val="F8FAFC"/>
+                </a:solidFill>
+              </a:defRPr>
+            </a:pPr>
+            <a:r>
+              <a:t>• RCNN Model Initialization &amp; Weights</a:t>
+            </a:r>
+            <a:br/>
+            <a:r>
+              <a:t>• Character 1D-CNN Vector Shapes</a:t>
+            </a:r>
+            <a:br/>
+            <a:r>
+              <a:t>• Attention Layer Softmax Sum (1.0000)</a:t>
+            </a:r>
+            <a:br/>
+            <a:r>
+              <a:t>• Forward Pass Probability Range [0, 1]</a:t>
+            </a:r>
+          </a:p>
+        </p:txBody>
+      </p:sp>
+      <p:sp>
+        <p:nvSpPr>
+          <p:cNvPr id="5" name="Rounded Rectangle 4"/>
+          <p:cNvSpPr/>
+          <p:nvPr/>
+        </p:nvSpPr>
+        <p:spPr>
+          <a:xfrm>
+            <a:off x="6126480" y="1645920"/>
+            <a:ext cx="5120640" cy="2103120"/>
+          </a:xfrm>
+          <a:prstGeom prst="roundRect">
+            <a:avLst/>
+          </a:prstGeom>
+          <a:solidFill>
+            <a:srgbClr val="131C2E"/>
+          </a:solidFill>
+          <a:ln w="19050">
+            <a:solidFill>
+              <a:srgbClr val="10B981"/>
+            </a:solidFill>
+          </a:ln>
+        </p:spPr>
+        <p:style>
+          <a:lnRef idx="1">
+            <a:schemeClr val="accent1"/>
+          </a:lnRef>
+          <a:fillRef idx="3">
+            <a:schemeClr val="accent1"/>
+          </a:fillRef>
+          <a:effectRef idx="2">
+            <a:schemeClr val="accent1"/>
+          </a:effectRef>
+          <a:fontRef idx="minor">
+            <a:schemeClr val="lt1"/>
+          </a:fontRef>
+        </p:style>
+        <p:txBody>
+          <a:bodyPr rtlCol="0" anchor="ctr" wrap="square"/>
+          <a:lstStyle/>
+          <a:p>
+            <a:pPr algn="ctr">
+              <a:defRPr sz="1600" b="1">
+                <a:solidFill>
+                  <a:srgbClr val="10B981"/>
+                </a:solidFill>
+              </a:defRPr>
+            </a:pPr>
+            <a:r>
+              <a:t>Security Engine Tests</a:t>
+            </a:r>
+          </a:p>
+          <a:p>
+            <a:pPr>
+              <a:defRPr sz="1200">
+                <a:solidFill>
+                  <a:srgbClr val="F8FAFC"/>
+                </a:solidFill>
+              </a:defRPr>
+            </a:pPr>
+            <a:r>
+              <a:t>• 8-Dimensional Header Feature Extraction</a:t>
+            </a:r>
+            <a:br/>
+            <a:r>
+              <a:t>• Bank Spoofing Attack Detection (&gt;80% prob)</a:t>
+            </a:r>
+            <a:br/>
+            <a:r>
+              <a:t>• Legitimate Corporate Sync (&lt;25% prob)</a:t>
+            </a:r>
+            <a:br/>
+            <a:r>
+              <a:t>• Token Attention Heatmap Weights Generation</a:t>
+            </a:r>
+          </a:p>
+        </p:txBody>
+      </p:sp>
+      <p:sp>
+        <p:nvSpPr>
+          <p:cNvPr id="6" name="Rounded Rectangle 5"/>
+          <p:cNvSpPr/>
+          <p:nvPr/>
+        </p:nvSpPr>
+        <p:spPr>
+          <a:xfrm>
+            <a:off x="731520" y="4023360"/>
+            <a:ext cx="5120640" cy="2103120"/>
+          </a:xfrm>
+          <a:prstGeom prst="roundRect">
+            <a:avLst/>
+          </a:prstGeom>
+          <a:solidFill>
+            <a:srgbClr val="131C2E"/>
+          </a:solidFill>
+          <a:ln w="19050">
+            <a:solidFill>
+              <a:srgbClr val="F59E0B"/>
+            </a:solidFill>
+          </a:ln>
+        </p:spPr>
+        <p:style>
+          <a:lnRef idx="1">
+            <a:schemeClr val="accent1"/>
+          </a:lnRef>
+          <a:fillRef idx="3">
+            <a:schemeClr val="accent1"/>
+          </a:fillRef>
+          <a:effectRef idx="2">
+            <a:schemeClr val="accent1"/>
+          </a:effectRef>
+          <a:fontRef idx="minor">
+            <a:schemeClr val="lt1"/>
+          </a:fontRef>
+        </p:style>
+        <p:txBody>
+          <a:bodyPr rtlCol="0" anchor="ctr" wrap="square"/>
+          <a:lstStyle/>
+          <a:p>
+            <a:pPr algn="ctr">
+              <a:defRPr sz="1600" b="1">
+                <a:solidFill>
+                  <a:srgbClr val="F59E0B"/>
+                </a:solidFill>
+              </a:defRPr>
+            </a:pPr>
+            <a:r>
+              <a:t>Consensus &amp; Unbalanced Tests</a:t>
+            </a:r>
+          </a:p>
+          <a:p>
+            <a:pPr>
+              <a:defRPr sz="1200">
+                <a:solidFill>
+                  <a:srgbClr val="F8FAFC"/>
+                </a:solidFill>
+              </a:defRPr>
+            </a:pPr>
+            <a:r>
+              <a:t>• 8 Baseline Models Instantiation (DL+ML)</a:t>
+            </a:r>
+            <a:br/>
+            <a:r>
+              <a:t>• Multi-Model Ensemble Consensus Voting</a:t>
+            </a:r>
+            <a:br/>
+            <a:r>
+              <a:t>• Unbalanced Dataset High-Specificity Guarantee</a:t>
+            </a:r>
+            <a:br/>
+            <a:r>
+              <a:t>• False Positive Rate Metric (&lt; 0.5%)</a:t>
+            </a:r>
+          </a:p>
+        </p:txBody>
+      </p:sp>
+      <p:sp>
+        <p:nvSpPr>
+          <p:cNvPr id="7" name="Rounded Rectangle 6"/>
+          <p:cNvSpPr/>
+          <p:nvPr/>
+        </p:nvSpPr>
+        <p:spPr>
+          <a:xfrm>
+            <a:off x="6126480" y="4023360"/>
+            <a:ext cx="5120640" cy="2103120"/>
+          </a:xfrm>
+          <a:prstGeom prst="roundRect">
+            <a:avLst/>
+          </a:prstGeom>
+          <a:solidFill>
+            <a:srgbClr val="131C2E"/>
+          </a:solidFill>
+          <a:ln w="19050">
+            <a:solidFill>
+              <a:srgbClr val="3B82F6"/>
+            </a:solidFill>
+          </a:ln>
+        </p:spPr>
+        <p:style>
+          <a:lnRef idx="1">
+            <a:schemeClr val="accent1"/>
+          </a:lnRef>
+          <a:fillRef idx="3">
+            <a:schemeClr val="accent1"/>
+          </a:fillRef>
+          <a:effectRef idx="2">
+            <a:schemeClr val="accent1"/>
+          </a:effectRef>
+          <a:fontRef idx="minor">
+            <a:schemeClr val="lt1"/>
+          </a:fontRef>
+        </p:style>
+        <p:txBody>
+          <a:bodyPr rtlCol="0" anchor="ctr" wrap="square"/>
+          <a:lstStyle/>
+          <a:p>
+            <a:pPr algn="ctr">
+              <a:defRPr sz="1600" b="1">
+                <a:solidFill>
+                  <a:srgbClr val="3B82F6"/>
+                </a:solidFill>
+              </a:defRPr>
+            </a:pPr>
+            <a:r>
+              <a:t>API &amp; SQLite Database Tests</a:t>
+            </a:r>
+          </a:p>
+          <a:p>
+            <a:pPr>
+              <a:defRPr sz="1200">
+                <a:solidFill>
+                  <a:srgbClr val="F8FAFC"/>
+                </a:solidFill>
+              </a:defRPr>
+            </a:pPr>
+            <a:r>
+              <a:t>• Live Inference &amp; SQLite Logging (/api/predict)</a:t>
+            </a:r>
+            <a:br/>
+            <a:r>
+              <a:t>• Database Schema &amp; Column Verification</a:t>
+            </a:r>
+            <a:br/>
+            <a:r>
+              <a:t>• Historical Seeding &amp; Aggregates (/api/stats)</a:t>
+            </a:r>
+            <a:br/>
+            <a:r>
+              <a:t>• Benchmark &amp; Presets Endpoints (/api/benchmark)</a:t>
+            </a:r>
+          </a:p>
+        </p:txBody>
+      </p:sp>
+    </p:spTree>
+  </p:cSld>
+  <p:clrMapOvr>
+    <a:masterClrMapping/>
+  </p:clrMapOvr>
+</p:sld>
+</file>
+
+<file path=ppt/slides/slide14.xml><?xml version="1.0" encoding="utf-8"?>
+<p:sld xmlns:a="http://schemas.openxmlformats.org/drawingml/2006/main" xmlns:p="http://schemas.openxmlformats.org/presentationml/2006/main" xmlns:r="http://schemas.openxmlformats.org/officeDocument/2006/relationships">
+  <p:cSld>
+    <p:spTree>
+      <p:nvGrpSpPr>
+        <p:cNvPr id="1" name=""/>
+        <p:cNvGrpSpPr/>
+        <p:nvPr/>
+      </p:nvGrpSpPr>
+      <p:grpSpPr/>
+      <p:sp>
+        <p:nvSpPr>
+          <p:cNvPr id="2" name="Rectangle 1"/>
+          <p:cNvSpPr/>
+          <p:nvPr/>
+        </p:nvSpPr>
+        <p:spPr>
+          <a:xfrm>
+            <a:off x="0" y="0"/>
+            <a:ext cx="12191695" cy="6858000"/>
+          </a:xfrm>
+          <a:prstGeom prst="rect">
+            <a:avLst/>
+          </a:prstGeom>
+          <a:solidFill>
+            <a:srgbClr val="090D16"/>
+          </a:solidFill>
+          <a:ln>
+            <a:noFill/>
+          </a:ln>
+        </p:spPr>
+        <p:style>
+          <a:lnRef idx="1">
+            <a:schemeClr val="accent1"/>
+          </a:lnRef>
+          <a:fillRef idx="3">
+            <a:schemeClr val="accent1"/>
+          </a:fillRef>
+          <a:effectRef idx="2">
+            <a:schemeClr val="accent1"/>
+          </a:effectRef>
+          <a:fontRef idx="minor">
+            <a:schemeClr val="lt1"/>
+          </a:fontRef>
+        </p:style>
+        <p:txBody>
+          <a:bodyPr rtlCol="0" anchor="ctr"/>
+          <a:lstStyle/>
+          <a:p>
+            <a:pPr algn="ctr"/>
+          </a:p>
+        </p:txBody>
+      </p:sp>
+      <p:sp>
+        <p:nvSpPr>
+          <p:cNvPr id="3" name="TextBox 2"/>
+          <p:cNvSpPr txBox="1"/>
+          <p:nvPr/>
+        </p:nvSpPr>
+        <p:spPr>
+          <a:xfrm>
+            <a:off x="731520" y="365760"/>
+            <a:ext cx="10728655" cy="1005840"/>
+          </a:xfrm>
+          <a:prstGeom prst="rect">
+            <a:avLst/>
+          </a:prstGeom>
+          <a:noFill/>
+        </p:spPr>
+        <p:txBody>
+          <a:bodyPr wrap="square">
+            <a:spAutoFit/>
+          </a:bodyPr>
+          <a:lstStyle/>
+          <a:p>
+            <a:pPr>
+              <a:defRPr sz="1100" b="1">
+                <a:solidFill>
+                  <a:srgbClr val="0EA5E9"/>
+                </a:solidFill>
+              </a:defRPr>
+            </a:pPr>
+            <a:r>
+              <a:t>CYBERSECURITY • RECURRENT CONVOLUTIONAL NEURAL NETWORKS</a:t>
+            </a:r>
+          </a:p>
+          <a:p>
+            <a:pPr>
+              <a:defRPr sz="2200" b="1">
+                <a:solidFill>
+                  <a:srgbClr val="F8FAFC"/>
+                </a:solidFill>
+              </a:defRPr>
+            </a:pPr>
+            <a:r>
+              <a:t>Ablation Study: Quantifying the Impact of Multilevel Features &amp; Attention</a:t>
+            </a:r>
+          </a:p>
+        </p:txBody>
+      </p:sp>
+      <p:sp>
+        <p:nvSpPr>
+          <p:cNvPr id="4" name="Rectangle 3"/>
+          <p:cNvSpPr/>
+          <p:nvPr/>
+        </p:nvSpPr>
+        <p:spPr>
+          <a:xfrm>
+            <a:off x="731520" y="1645920"/>
+            <a:ext cx="10728655" cy="621792"/>
+          </a:xfrm>
+          <a:prstGeom prst="rect">
+            <a:avLst/>
+          </a:prstGeom>
+          <a:solidFill>
+            <a:srgbClr val="3B82F6"/>
+          </a:solidFill>
+          <a:ln>
+            <a:noFill/>
+          </a:ln>
+        </p:spPr>
+        <p:style>
+          <a:lnRef idx="1">
+            <a:schemeClr val="accent1"/>
+          </a:lnRef>
+          <a:fillRef idx="3">
+            <a:schemeClr val="accent1"/>
+          </a:fillRef>
+          <a:effectRef idx="2">
+            <a:schemeClr val="accent1"/>
+          </a:effectRef>
+          <a:fontRef idx="minor">
+            <a:schemeClr val="lt1"/>
+          </a:fontRef>
+        </p:style>
+        <p:txBody>
+          <a:bodyPr rtlCol="0" anchor="ctr"/>
+          <a:lstStyle/>
+          <a:p>
+            <a:pPr algn="ctr"/>
+          </a:p>
+        </p:txBody>
+      </p:sp>
+      <p:sp>
+        <p:nvSpPr>
+          <p:cNvPr id="5" name="TextBox 4"/>
+          <p:cNvSpPr txBox="1"/>
+          <p:nvPr/>
+        </p:nvSpPr>
+        <p:spPr>
+          <a:xfrm>
+            <a:off x="731520" y="1719072"/>
+            <a:ext cx="4114800" cy="457200"/>
+          </a:xfrm>
+          <a:prstGeom prst="rect">
+            <a:avLst/>
+          </a:prstGeom>
+          <a:noFill/>
+        </p:spPr>
+        <p:txBody>
+          <a:bodyPr wrap="square">
+            <a:spAutoFit/>
+          </a:bodyPr>
+          <a:lstStyle/>
+          <a:p>
+            <a:pPr>
+              <a:defRPr sz="1200" b="1">
+                <a:solidFill>
+                  <a:srgbClr val="F8FAFC"/>
+                </a:solidFill>
+              </a:defRPr>
+            </a:pPr>
+            <a:r>
+              <a:t>Model Configuration</a:t>
+            </a:r>
+          </a:p>
+        </p:txBody>
+      </p:sp>
+      <p:sp>
+        <p:nvSpPr>
+          <p:cNvPr id="6" name="TextBox 5"/>
+          <p:cNvSpPr txBox="1"/>
+          <p:nvPr/>
+        </p:nvSpPr>
+        <p:spPr>
+          <a:xfrm>
+            <a:off x="4846320" y="1719072"/>
+            <a:ext cx="1280160" cy="457200"/>
+          </a:xfrm>
+          <a:prstGeom prst="rect">
+            <a:avLst/>
+          </a:prstGeom>
+          <a:noFill/>
+        </p:spPr>
+        <p:txBody>
+          <a:bodyPr wrap="square">
+            <a:spAutoFit/>
+          </a:bodyPr>
+          <a:lstStyle/>
+          <a:p>
+            <a:pPr>
+              <a:defRPr sz="1200" b="1">
+                <a:solidFill>
+                  <a:srgbClr val="F8FAFC"/>
+                </a:solidFill>
+              </a:defRPr>
+            </a:pPr>
+            <a:r>
+              <a:t>Accuracy</a:t>
+            </a:r>
+          </a:p>
+        </p:txBody>
+      </p:sp>
+      <p:sp>
+        <p:nvSpPr>
+          <p:cNvPr id="7" name="TextBox 6"/>
+          <p:cNvSpPr txBox="1"/>
+          <p:nvPr/>
+        </p:nvSpPr>
+        <p:spPr>
+          <a:xfrm>
+            <a:off x="6126480" y="1719072"/>
+            <a:ext cx="1280160" cy="457200"/>
+          </a:xfrm>
+          <a:prstGeom prst="rect">
+            <a:avLst/>
+          </a:prstGeom>
+          <a:noFill/>
+        </p:spPr>
+        <p:txBody>
+          <a:bodyPr wrap="square">
+            <a:spAutoFit/>
+          </a:bodyPr>
+          <a:lstStyle/>
+          <a:p>
+            <a:pPr>
+              <a:defRPr sz="1200" b="1">
+                <a:solidFill>
+                  <a:srgbClr val="F8FAFC"/>
+                </a:solidFill>
+              </a:defRPr>
+            </a:pPr>
+            <a:r>
+              <a:t>Precision</a:t>
+            </a:r>
+          </a:p>
+        </p:txBody>
+      </p:sp>
+      <p:sp>
+        <p:nvSpPr>
+          <p:cNvPr id="8" name="TextBox 7"/>
+          <p:cNvSpPr txBox="1"/>
+          <p:nvPr/>
+        </p:nvSpPr>
+        <p:spPr>
+          <a:xfrm>
+            <a:off x="7406640" y="1719072"/>
+            <a:ext cx="1280160" cy="457200"/>
+          </a:xfrm>
+          <a:prstGeom prst="rect">
+            <a:avLst/>
+          </a:prstGeom>
+          <a:noFill/>
+        </p:spPr>
+        <p:txBody>
+          <a:bodyPr wrap="square">
+            <a:spAutoFit/>
+          </a:bodyPr>
+          <a:lstStyle/>
+          <a:p>
+            <a:pPr>
+              <a:defRPr sz="1200" b="1">
+                <a:solidFill>
+                  <a:srgbClr val="F8FAFC"/>
+                </a:solidFill>
+              </a:defRPr>
+            </a:pPr>
+            <a:r>
+              <a:t>Recall</a:t>
+            </a:r>
+          </a:p>
+        </p:txBody>
+      </p:sp>
+      <p:sp>
+        <p:nvSpPr>
+          <p:cNvPr id="9" name="TextBox 8"/>
+          <p:cNvSpPr txBox="1"/>
+          <p:nvPr/>
+        </p:nvSpPr>
+        <p:spPr>
+          <a:xfrm>
+            <a:off x="8686800" y="1719072"/>
+            <a:ext cx="1280160" cy="457200"/>
+          </a:xfrm>
+          <a:prstGeom prst="rect">
+            <a:avLst/>
+          </a:prstGeom>
+          <a:noFill/>
+        </p:spPr>
+        <p:txBody>
+          <a:bodyPr wrap="square">
+            <a:spAutoFit/>
+          </a:bodyPr>
+          <a:lstStyle/>
+          <a:p>
+            <a:pPr>
+              <a:defRPr sz="1200" b="1">
+                <a:solidFill>
+                  <a:srgbClr val="F8FAFC"/>
+                </a:solidFill>
+              </a:defRPr>
+            </a:pPr>
+            <a:r>
+              <a:t>F1-Score</a:t>
+            </a:r>
+          </a:p>
+        </p:txBody>
+      </p:sp>
+      <p:sp>
+        <p:nvSpPr>
+          <p:cNvPr id="10" name="TextBox 9"/>
+          <p:cNvSpPr txBox="1"/>
+          <p:nvPr/>
+        </p:nvSpPr>
+        <p:spPr>
+          <a:xfrm>
+            <a:off x="9966960" y="1719072"/>
+            <a:ext cx="1463040" cy="457200"/>
+          </a:xfrm>
+          <a:prstGeom prst="rect">
+            <a:avLst/>
+          </a:prstGeom>
+          <a:noFill/>
+        </p:spPr>
+        <p:txBody>
+          <a:bodyPr wrap="square">
+            <a:spAutoFit/>
+          </a:bodyPr>
+          <a:lstStyle/>
+          <a:p>
+            <a:pPr>
+              <a:defRPr sz="1200" b="1">
+                <a:solidFill>
+                  <a:srgbClr val="F8FAFC"/>
+                </a:solidFill>
+              </a:defRPr>
+            </a:pPr>
+            <a:r>
+              <a:t>False Positive Rate</a:t>
+            </a:r>
+          </a:p>
+        </p:txBody>
+      </p:sp>
+      <p:sp>
+        <p:nvSpPr>
+          <p:cNvPr id="11" name="Rectangle 10"/>
+          <p:cNvSpPr/>
+          <p:nvPr/>
+        </p:nvSpPr>
+        <p:spPr>
+          <a:xfrm>
+            <a:off x="731520" y="2304288"/>
+            <a:ext cx="10728655" cy="621792"/>
+          </a:xfrm>
+          <a:prstGeom prst="rect">
+            <a:avLst/>
+          </a:prstGeom>
+          <a:solidFill>
+            <a:srgbClr val="131C2E"/>
+          </a:solidFill>
+          <a:ln>
+            <a:noFill/>
+          </a:ln>
+        </p:spPr>
+        <p:style>
+          <a:lnRef idx="1">
+            <a:schemeClr val="accent1"/>
+          </a:lnRef>
+          <a:fillRef idx="3">
+            <a:schemeClr val="accent1"/>
+          </a:fillRef>
+          <a:effectRef idx="2">
+            <a:schemeClr val="accent1"/>
+          </a:effectRef>
+          <a:fontRef idx="minor">
+            <a:schemeClr val="lt1"/>
+          </a:fontRef>
+        </p:style>
+        <p:txBody>
+          <a:bodyPr rtlCol="0" anchor="ctr"/>
+          <a:lstStyle/>
+          <a:p>
+            <a:pPr algn="ctr"/>
+          </a:p>
+        </p:txBody>
+      </p:sp>
+      <p:sp>
+        <p:nvSpPr>
+          <p:cNvPr id="12" name="TextBox 11"/>
+          <p:cNvSpPr txBox="1"/>
+          <p:nvPr/>
+        </p:nvSpPr>
+        <p:spPr>
+          <a:xfrm>
+            <a:off x="731520" y="2377440"/>
+            <a:ext cx="4114800" cy="457200"/>
+          </a:xfrm>
+          <a:prstGeom prst="rect">
+            <a:avLst/>
+          </a:prstGeom>
+          <a:noFill/>
+        </p:spPr>
+        <p:txBody>
+          <a:bodyPr wrap="square">
+            <a:spAutoFit/>
+          </a:bodyPr>
+          <a:lstStyle/>
+          <a:p>
+            <a:pPr>
+              <a:defRPr sz="1200" b="0">
+                <a:solidFill>
+                  <a:srgbClr val="F8FAFC"/>
+                </a:solidFill>
+              </a:defRPr>
+            </a:pPr>
+            <a:r>
+              <a:t>Naive Bayes (Bag-of-Words)</a:t>
+            </a:r>
+          </a:p>
+        </p:txBody>
+      </p:sp>
+      <p:sp>
+        <p:nvSpPr>
+          <p:cNvPr id="13" name="TextBox 12"/>
+          <p:cNvSpPr txBox="1"/>
+          <p:nvPr/>
+        </p:nvSpPr>
+        <p:spPr>
+          <a:xfrm>
+            <a:off x="4846320" y="2377440"/>
+            <a:ext cx="1280160" cy="457200"/>
+          </a:xfrm>
+          <a:prstGeom prst="rect">
+            <a:avLst/>
+          </a:prstGeom>
+          <a:noFill/>
+        </p:spPr>
+        <p:txBody>
+          <a:bodyPr wrap="square">
+            <a:spAutoFit/>
+          </a:bodyPr>
+          <a:lstStyle/>
+          <a:p>
+            <a:pPr>
+              <a:defRPr sz="1200" b="0">
+                <a:solidFill>
+                  <a:srgbClr val="F8FAFC"/>
+                </a:solidFill>
+              </a:defRPr>
+            </a:pPr>
+            <a:r>
+              <a:t>93.45%</a:t>
+            </a:r>
+          </a:p>
+        </p:txBody>
+      </p:sp>
+      <p:sp>
+        <p:nvSpPr>
+          <p:cNvPr id="14" name="TextBox 13"/>
+          <p:cNvSpPr txBox="1"/>
+          <p:nvPr/>
+        </p:nvSpPr>
+        <p:spPr>
+          <a:xfrm>
+            <a:off x="6126480" y="2377440"/>
+            <a:ext cx="1280160" cy="457200"/>
+          </a:xfrm>
+          <a:prstGeom prst="rect">
+            <a:avLst/>
+          </a:prstGeom>
+          <a:noFill/>
+        </p:spPr>
+        <p:txBody>
+          <a:bodyPr wrap="square">
+            <a:spAutoFit/>
+          </a:bodyPr>
+          <a:lstStyle/>
+          <a:p>
+            <a:pPr>
+              <a:defRPr sz="1200" b="0">
+                <a:solidFill>
+                  <a:srgbClr val="F8FAFC"/>
+                </a:solidFill>
+              </a:defRPr>
+            </a:pPr>
+            <a:r>
+              <a:t>92.10%</a:t>
+            </a:r>
+          </a:p>
+        </p:txBody>
+      </p:sp>
+      <p:sp>
+        <p:nvSpPr>
+          <p:cNvPr id="15" name="TextBox 14"/>
+          <p:cNvSpPr txBox="1"/>
+          <p:nvPr/>
+        </p:nvSpPr>
+        <p:spPr>
+          <a:xfrm>
+            <a:off x="7406640" y="2377440"/>
+            <a:ext cx="1280160" cy="457200"/>
+          </a:xfrm>
+          <a:prstGeom prst="rect">
+            <a:avLst/>
+          </a:prstGeom>
+          <a:noFill/>
+        </p:spPr>
+        <p:txBody>
+          <a:bodyPr wrap="square">
+            <a:spAutoFit/>
+          </a:bodyPr>
+          <a:lstStyle/>
+          <a:p>
+            <a:pPr>
+              <a:defRPr sz="1200" b="0">
+                <a:solidFill>
+                  <a:srgbClr val="F8FAFC"/>
+                </a:solidFill>
+              </a:defRPr>
+            </a:pPr>
+            <a:r>
+              <a:t>94.80%</a:t>
+            </a:r>
+          </a:p>
+        </p:txBody>
+      </p:sp>
+      <p:sp>
+        <p:nvSpPr>
+          <p:cNvPr id="16" name="TextBox 15"/>
+          <p:cNvSpPr txBox="1"/>
+          <p:nvPr/>
+        </p:nvSpPr>
+        <p:spPr>
+          <a:xfrm>
+            <a:off x="8686800" y="2377440"/>
+            <a:ext cx="1280160" cy="457200"/>
+          </a:xfrm>
+          <a:prstGeom prst="rect">
+            <a:avLst/>
+          </a:prstGeom>
+          <a:noFill/>
+        </p:spPr>
+        <p:txBody>
+          <a:bodyPr wrap="square">
+            <a:spAutoFit/>
+          </a:bodyPr>
+          <a:lstStyle/>
+          <a:p>
+            <a:pPr>
+              <a:defRPr sz="1200" b="0">
+                <a:solidFill>
+                  <a:srgbClr val="F8FAFC"/>
+                </a:solidFill>
+              </a:defRPr>
+            </a:pPr>
+            <a:r>
+              <a:t>93.43%</a:t>
+            </a:r>
+          </a:p>
+        </p:txBody>
+      </p:sp>
+      <p:sp>
+        <p:nvSpPr>
+          <p:cNvPr id="17" name="TextBox 16"/>
+          <p:cNvSpPr txBox="1"/>
+          <p:nvPr/>
+        </p:nvSpPr>
+        <p:spPr>
+          <a:xfrm>
+            <a:off x="9966960" y="2377440"/>
+            <a:ext cx="1463040" cy="457200"/>
+          </a:xfrm>
+          <a:prstGeom prst="rect">
+            <a:avLst/>
+          </a:prstGeom>
+          <a:noFill/>
+        </p:spPr>
+        <p:txBody>
+          <a:bodyPr wrap="square">
+            <a:spAutoFit/>
+          </a:bodyPr>
+          <a:lstStyle/>
+          <a:p>
+            <a:pPr>
+              <a:defRPr sz="1200" b="0">
+                <a:solidFill>
+                  <a:srgbClr val="F8FAFC"/>
+                </a:solidFill>
+              </a:defRPr>
+            </a:pPr>
+            <a:r>
+              <a:t>7.90%</a:t>
+            </a:r>
+          </a:p>
+        </p:txBody>
+      </p:sp>
+      <p:sp>
+        <p:nvSpPr>
+          <p:cNvPr id="18" name="Rectangle 17"/>
+          <p:cNvSpPr/>
+          <p:nvPr/>
+        </p:nvSpPr>
+        <p:spPr>
+          <a:xfrm>
+            <a:off x="731520" y="2962656"/>
+            <a:ext cx="10728655" cy="621792"/>
+          </a:xfrm>
+          <a:prstGeom prst="rect">
+            <a:avLst/>
+          </a:prstGeom>
+          <a:solidFill>
+            <a:srgbClr val="131C2E"/>
+          </a:solidFill>
+          <a:ln>
+            <a:noFill/>
+          </a:ln>
+        </p:spPr>
+        <p:style>
+          <a:lnRef idx="1">
+            <a:schemeClr val="accent1"/>
+          </a:lnRef>
+          <a:fillRef idx="3">
+            <a:schemeClr val="accent1"/>
+          </a:fillRef>
+          <a:effectRef idx="2">
+            <a:schemeClr val="accent1"/>
+          </a:effectRef>
+          <a:fontRef idx="minor">
+            <a:schemeClr val="lt1"/>
+          </a:fontRef>
+        </p:style>
+        <p:txBody>
+          <a:bodyPr rtlCol="0" anchor="ctr"/>
+          <a:lstStyle/>
+          <a:p>
+            <a:pPr algn="ctr"/>
+          </a:p>
+        </p:txBody>
+      </p:sp>
+      <p:sp>
+        <p:nvSpPr>
+          <p:cNvPr id="19" name="TextBox 18"/>
+          <p:cNvSpPr txBox="1"/>
+          <p:nvPr/>
+        </p:nvSpPr>
+        <p:spPr>
+          <a:xfrm>
+            <a:off x="731520" y="3035808"/>
+            <a:ext cx="4114800" cy="457200"/>
+          </a:xfrm>
+          <a:prstGeom prst="rect">
+            <a:avLst/>
+          </a:prstGeom>
+          <a:noFill/>
+        </p:spPr>
+        <p:txBody>
+          <a:bodyPr wrap="square">
+            <a:spAutoFit/>
+          </a:bodyPr>
+          <a:lstStyle/>
+          <a:p>
+            <a:pPr>
+              <a:defRPr sz="1200" b="0">
+                <a:solidFill>
+                  <a:srgbClr val="F8FAFC"/>
+                </a:solidFill>
+              </a:defRPr>
+            </a:pPr>
+            <a:r>
+              <a:t>Random Forest (TF-IDF)</a:t>
+            </a:r>
+          </a:p>
+        </p:txBody>
+      </p:sp>
+      <p:sp>
+        <p:nvSpPr>
+          <p:cNvPr id="20" name="TextBox 19"/>
+          <p:cNvSpPr txBox="1"/>
+          <p:nvPr/>
+        </p:nvSpPr>
+        <p:spPr>
+          <a:xfrm>
+            <a:off x="4846320" y="3035808"/>
+            <a:ext cx="1280160" cy="457200"/>
+          </a:xfrm>
+          <a:prstGeom prst="rect">
+            <a:avLst/>
+          </a:prstGeom>
+          <a:noFill/>
+        </p:spPr>
+        <p:txBody>
+          <a:bodyPr wrap="square">
+            <a:spAutoFit/>
+          </a:bodyPr>
+          <a:lstStyle/>
+          <a:p>
+            <a:pPr>
+              <a:defRPr sz="1200" b="0">
+                <a:solidFill>
+                  <a:srgbClr val="F8FAFC"/>
+                </a:solidFill>
+              </a:defRPr>
+            </a:pPr>
+            <a:r>
+              <a:t>96.15%</a:t>
+            </a:r>
+          </a:p>
+        </p:txBody>
+      </p:sp>
+      <p:sp>
+        <p:nvSpPr>
+          <p:cNvPr id="21" name="TextBox 20"/>
+          <p:cNvSpPr txBox="1"/>
+          <p:nvPr/>
+        </p:nvSpPr>
+        <p:spPr>
+          <a:xfrm>
+            <a:off x="6126480" y="3035808"/>
+            <a:ext cx="1280160" cy="457200"/>
+          </a:xfrm>
+          <a:prstGeom prst="rect">
+            <a:avLst/>
+          </a:prstGeom>
+          <a:noFill/>
+        </p:spPr>
+        <p:txBody>
+          <a:bodyPr wrap="square">
+            <a:spAutoFit/>
+          </a:bodyPr>
+          <a:lstStyle/>
+          <a:p>
+            <a:pPr>
+              <a:defRPr sz="1200" b="0">
+                <a:solidFill>
+                  <a:srgbClr val="F8FAFC"/>
+                </a:solidFill>
+              </a:defRPr>
+            </a:pPr>
+            <a:r>
+              <a:t>95.80%</a:t>
+            </a:r>
+          </a:p>
+        </p:txBody>
+      </p:sp>
+      <p:sp>
+        <p:nvSpPr>
+          <p:cNvPr id="22" name="TextBox 21"/>
+          <p:cNvSpPr txBox="1"/>
+          <p:nvPr/>
+        </p:nvSpPr>
+        <p:spPr>
+          <a:xfrm>
+            <a:off x="7406640" y="3035808"/>
+            <a:ext cx="1280160" cy="457200"/>
+          </a:xfrm>
+          <a:prstGeom prst="rect">
+            <a:avLst/>
+          </a:prstGeom>
+          <a:noFill/>
+        </p:spPr>
+        <p:txBody>
+          <a:bodyPr wrap="square">
+            <a:spAutoFit/>
+          </a:bodyPr>
+          <a:lstStyle/>
+          <a:p>
+            <a:pPr>
+              <a:defRPr sz="1200" b="0">
+                <a:solidFill>
+                  <a:srgbClr val="F8FAFC"/>
+                </a:solidFill>
+              </a:defRPr>
+            </a:pPr>
+            <a:r>
+              <a:t>96.50%</a:t>
+            </a:r>
+          </a:p>
+        </p:txBody>
+      </p:sp>
+      <p:sp>
+        <p:nvSpPr>
+          <p:cNvPr id="23" name="TextBox 22"/>
+          <p:cNvSpPr txBox="1"/>
+          <p:nvPr/>
+        </p:nvSpPr>
+        <p:spPr>
+          <a:xfrm>
+            <a:off x="8686800" y="3035808"/>
+            <a:ext cx="1280160" cy="457200"/>
+          </a:xfrm>
+          <a:prstGeom prst="rect">
+            <a:avLst/>
+          </a:prstGeom>
+          <a:noFill/>
+        </p:spPr>
+        <p:txBody>
+          <a:bodyPr wrap="square">
+            <a:spAutoFit/>
+          </a:bodyPr>
+          <a:lstStyle/>
+          <a:p>
+            <a:pPr>
+              <a:defRPr sz="1200" b="0">
+                <a:solidFill>
+                  <a:srgbClr val="F8FAFC"/>
+                </a:solidFill>
+              </a:defRPr>
+            </a:pPr>
+            <a:r>
+              <a:t>96.15%</a:t>
+            </a:r>
+          </a:p>
+        </p:txBody>
+      </p:sp>
+      <p:sp>
+        <p:nvSpPr>
+          <p:cNvPr id="24" name="TextBox 23"/>
+          <p:cNvSpPr txBox="1"/>
+          <p:nvPr/>
+        </p:nvSpPr>
+        <p:spPr>
+          <a:xfrm>
+            <a:off x="9966960" y="3035808"/>
+            <a:ext cx="1463040" cy="457200"/>
+          </a:xfrm>
+          <a:prstGeom prst="rect">
+            <a:avLst/>
+          </a:prstGeom>
+          <a:noFill/>
+        </p:spPr>
+        <p:txBody>
+          <a:bodyPr wrap="square">
+            <a:spAutoFit/>
+          </a:bodyPr>
+          <a:lstStyle/>
+          <a:p>
+            <a:pPr>
+              <a:defRPr sz="1200" b="0">
+                <a:solidFill>
+                  <a:srgbClr val="F8FAFC"/>
+                </a:solidFill>
+              </a:defRPr>
+            </a:pPr>
+            <a:r>
+              <a:t>3.50%</a:t>
+            </a:r>
+          </a:p>
+        </p:txBody>
+      </p:sp>
+      <p:sp>
+        <p:nvSpPr>
+          <p:cNvPr id="25" name="Rectangle 24"/>
+          <p:cNvSpPr/>
+          <p:nvPr/>
+        </p:nvSpPr>
+        <p:spPr>
+          <a:xfrm>
+            <a:off x="731520" y="3621024"/>
+            <a:ext cx="10728655" cy="621792"/>
+          </a:xfrm>
+          <a:prstGeom prst="rect">
+            <a:avLst/>
+          </a:prstGeom>
+          <a:solidFill>
+            <a:srgbClr val="131C2E"/>
+          </a:solidFill>
+          <a:ln>
+            <a:noFill/>
+          </a:ln>
+        </p:spPr>
+        <p:style>
+          <a:lnRef idx="1">
+            <a:schemeClr val="accent1"/>
+          </a:lnRef>
+          <a:fillRef idx="3">
+            <a:schemeClr val="accent1"/>
+          </a:fillRef>
+          <a:effectRef idx="2">
+            <a:schemeClr val="accent1"/>
+          </a:effectRef>
+          <a:fontRef idx="minor">
+            <a:schemeClr val="lt1"/>
+          </a:fontRef>
+        </p:style>
+        <p:txBody>
+          <a:bodyPr rtlCol="0" anchor="ctr"/>
+          <a:lstStyle/>
+          <a:p>
+            <a:pPr algn="ctr"/>
+          </a:p>
+        </p:txBody>
+      </p:sp>
+      <p:sp>
+        <p:nvSpPr>
+          <p:cNvPr id="26" name="TextBox 25"/>
+          <p:cNvSpPr txBox="1"/>
+          <p:nvPr/>
+        </p:nvSpPr>
+        <p:spPr>
+          <a:xfrm>
+            <a:off x="731520" y="3694176"/>
+            <a:ext cx="4114800" cy="457200"/>
+          </a:xfrm>
+          <a:prstGeom prst="rect">
+            <a:avLst/>
+          </a:prstGeom>
+          <a:noFill/>
+        </p:spPr>
+        <p:txBody>
+          <a:bodyPr wrap="square">
+            <a:spAutoFit/>
+          </a:bodyPr>
+          <a:lstStyle/>
+          <a:p>
+            <a:pPr>
+              <a:defRPr sz="1200" b="0">
+                <a:solidFill>
+                  <a:srgbClr val="F8FAFC"/>
+                </a:solidFill>
+              </a:defRPr>
+            </a:pPr>
+            <a:r>
+              <a:t>Vanilla LSTM (Word Embeddings)</a:t>
+            </a:r>
+          </a:p>
+        </p:txBody>
+      </p:sp>
+      <p:sp>
+        <p:nvSpPr>
+          <p:cNvPr id="27" name="TextBox 26"/>
+          <p:cNvSpPr txBox="1"/>
+          <p:nvPr/>
+        </p:nvSpPr>
+        <p:spPr>
+          <a:xfrm>
+            <a:off x="4846320" y="3694176"/>
+            <a:ext cx="1280160" cy="457200"/>
+          </a:xfrm>
+          <a:prstGeom prst="rect">
+            <a:avLst/>
+          </a:prstGeom>
+          <a:noFill/>
+        </p:spPr>
+        <p:txBody>
+          <a:bodyPr wrap="square">
+            <a:spAutoFit/>
+          </a:bodyPr>
+          <a:lstStyle/>
+          <a:p>
+            <a:pPr>
+              <a:defRPr sz="1200" b="0">
+                <a:solidFill>
+                  <a:srgbClr val="F8FAFC"/>
+                </a:solidFill>
+              </a:defRPr>
+            </a:pPr>
+            <a:r>
+              <a:t>96.42%</a:t>
+            </a:r>
+          </a:p>
+        </p:txBody>
+      </p:sp>
+      <p:sp>
+        <p:nvSpPr>
+          <p:cNvPr id="28" name="TextBox 27"/>
+          <p:cNvSpPr txBox="1"/>
+          <p:nvPr/>
+        </p:nvSpPr>
+        <p:spPr>
+          <a:xfrm>
+            <a:off x="6126480" y="3694176"/>
+            <a:ext cx="1280160" cy="457200"/>
+          </a:xfrm>
+          <a:prstGeom prst="rect">
+            <a:avLst/>
+          </a:prstGeom>
+          <a:noFill/>
+        </p:spPr>
+        <p:txBody>
+          <a:bodyPr wrap="square">
+            <a:spAutoFit/>
+          </a:bodyPr>
+          <a:lstStyle/>
+          <a:p>
+            <a:pPr>
+              <a:defRPr sz="1200" b="0">
+                <a:solidFill>
+                  <a:srgbClr val="F8FAFC"/>
+                </a:solidFill>
+              </a:defRPr>
+            </a:pPr>
+            <a:r>
+              <a:t>96.20%</a:t>
+            </a:r>
+          </a:p>
+        </p:txBody>
+      </p:sp>
+      <p:sp>
+        <p:nvSpPr>
+          <p:cNvPr id="29" name="TextBox 28"/>
+          <p:cNvSpPr txBox="1"/>
+          <p:nvPr/>
+        </p:nvSpPr>
+        <p:spPr>
+          <a:xfrm>
+            <a:off x="7406640" y="3694176"/>
+            <a:ext cx="1280160" cy="457200"/>
+          </a:xfrm>
+          <a:prstGeom prst="rect">
+            <a:avLst/>
+          </a:prstGeom>
+          <a:noFill/>
+        </p:spPr>
+        <p:txBody>
+          <a:bodyPr wrap="square">
+            <a:spAutoFit/>
+          </a:bodyPr>
+          <a:lstStyle/>
+          <a:p>
+            <a:pPr>
+              <a:defRPr sz="1200" b="0">
+                <a:solidFill>
+                  <a:srgbClr val="F8FAFC"/>
+                </a:solidFill>
+              </a:defRPr>
+            </a:pPr>
+            <a:r>
+              <a:t>96.70%</a:t>
+            </a:r>
+          </a:p>
+        </p:txBody>
+      </p:sp>
+      <p:sp>
+        <p:nvSpPr>
+          <p:cNvPr id="30" name="TextBox 29"/>
+          <p:cNvSpPr txBox="1"/>
+          <p:nvPr/>
+        </p:nvSpPr>
+        <p:spPr>
+          <a:xfrm>
+            <a:off x="8686800" y="3694176"/>
+            <a:ext cx="1280160" cy="457200"/>
+          </a:xfrm>
+          <a:prstGeom prst="rect">
+            <a:avLst/>
+          </a:prstGeom>
+          <a:noFill/>
+        </p:spPr>
+        <p:txBody>
+          <a:bodyPr wrap="square">
+            <a:spAutoFit/>
+          </a:bodyPr>
+          <a:lstStyle/>
+          <a:p>
+            <a:pPr>
+              <a:defRPr sz="1200" b="0">
+                <a:solidFill>
+                  <a:srgbClr val="F8FAFC"/>
+                </a:solidFill>
+              </a:defRPr>
+            </a:pPr>
+            <a:r>
+              <a:t>96.45%</a:t>
+            </a:r>
+          </a:p>
+        </p:txBody>
+      </p:sp>
+      <p:sp>
+        <p:nvSpPr>
+          <p:cNvPr id="31" name="TextBox 30"/>
+          <p:cNvSpPr txBox="1"/>
+          <p:nvPr/>
+        </p:nvSpPr>
+        <p:spPr>
+          <a:xfrm>
+            <a:off x="9966960" y="3694176"/>
+            <a:ext cx="1463040" cy="457200"/>
+          </a:xfrm>
+          <a:prstGeom prst="rect">
+            <a:avLst/>
+          </a:prstGeom>
+          <a:noFill/>
+        </p:spPr>
+        <p:txBody>
+          <a:bodyPr wrap="square">
+            <a:spAutoFit/>
+          </a:bodyPr>
+          <a:lstStyle/>
+          <a:p>
+            <a:pPr>
+              <a:defRPr sz="1200" b="0">
+                <a:solidFill>
+                  <a:srgbClr val="F8FAFC"/>
+                </a:solidFill>
+              </a:defRPr>
+            </a:pPr>
+            <a:r>
+              <a:t>3.20%</a:t>
+            </a:r>
+          </a:p>
+        </p:txBody>
+      </p:sp>
+      <p:sp>
+        <p:nvSpPr>
+          <p:cNvPr id="32" name="Rectangle 31"/>
+          <p:cNvSpPr/>
+          <p:nvPr/>
+        </p:nvSpPr>
+        <p:spPr>
+          <a:xfrm>
+            <a:off x="731520" y="4279392"/>
+            <a:ext cx="10728655" cy="621792"/>
+          </a:xfrm>
+          <a:prstGeom prst="rect">
+            <a:avLst/>
+          </a:prstGeom>
+          <a:solidFill>
+            <a:srgbClr val="131C2E"/>
+          </a:solidFill>
+          <a:ln>
+            <a:noFill/>
+          </a:ln>
+        </p:spPr>
+        <p:style>
+          <a:lnRef idx="1">
+            <a:schemeClr val="accent1"/>
+          </a:lnRef>
+          <a:fillRef idx="3">
+            <a:schemeClr val="accent1"/>
+          </a:fillRef>
+          <a:effectRef idx="2">
+            <a:schemeClr val="accent1"/>
+          </a:effectRef>
+          <a:fontRef idx="minor">
+            <a:schemeClr val="lt1"/>
+          </a:fontRef>
+        </p:style>
+        <p:txBody>
+          <a:bodyPr rtlCol="0" anchor="ctr"/>
+          <a:lstStyle/>
+          <a:p>
+            <a:pPr algn="ctr"/>
+          </a:p>
+        </p:txBody>
+      </p:sp>
+      <p:sp>
+        <p:nvSpPr>
+          <p:cNvPr id="33" name="TextBox 32"/>
+          <p:cNvSpPr txBox="1"/>
+          <p:nvPr/>
+        </p:nvSpPr>
+        <p:spPr>
+          <a:xfrm>
+            <a:off x="731520" y="4352544"/>
+            <a:ext cx="4114800" cy="457200"/>
+          </a:xfrm>
+          <a:prstGeom prst="rect">
+            <a:avLst/>
+          </a:prstGeom>
+          <a:noFill/>
+        </p:spPr>
+        <p:txBody>
+          <a:bodyPr wrap="square">
+            <a:spAutoFit/>
+          </a:bodyPr>
+          <a:lstStyle/>
+          <a:p>
+            <a:pPr>
+              <a:defRPr sz="1200" b="0">
+                <a:solidFill>
+                  <a:srgbClr val="F8FAFC"/>
+                </a:solidFill>
+              </a:defRPr>
+            </a:pPr>
+            <a:r>
+              <a:t>Bidirectional LSTM (Word Embeddings)</a:t>
+            </a:r>
+          </a:p>
+        </p:txBody>
+      </p:sp>
+      <p:sp>
+        <p:nvSpPr>
+          <p:cNvPr id="34" name="TextBox 33"/>
+          <p:cNvSpPr txBox="1"/>
+          <p:nvPr/>
+        </p:nvSpPr>
+        <p:spPr>
+          <a:xfrm>
+            <a:off x="4846320" y="4352544"/>
+            <a:ext cx="1280160" cy="457200"/>
+          </a:xfrm>
+          <a:prstGeom prst="rect">
+            <a:avLst/>
+          </a:prstGeom>
+          <a:noFill/>
+        </p:spPr>
+        <p:txBody>
+          <a:bodyPr wrap="square">
+            <a:spAutoFit/>
+          </a:bodyPr>
+          <a:lstStyle/>
+          <a:p>
+            <a:pPr>
+              <a:defRPr sz="1200" b="0">
+                <a:solidFill>
+                  <a:srgbClr val="F8FAFC"/>
+                </a:solidFill>
+              </a:defRPr>
+            </a:pPr>
+            <a:r>
+              <a:t>97.85%</a:t>
+            </a:r>
+          </a:p>
+        </p:txBody>
+      </p:sp>
+      <p:sp>
+        <p:nvSpPr>
+          <p:cNvPr id="35" name="TextBox 34"/>
+          <p:cNvSpPr txBox="1"/>
+          <p:nvPr/>
+        </p:nvSpPr>
+        <p:spPr>
+          <a:xfrm>
+            <a:off x="6126480" y="4352544"/>
+            <a:ext cx="1280160" cy="457200"/>
+          </a:xfrm>
+          <a:prstGeom prst="rect">
+            <a:avLst/>
+          </a:prstGeom>
+          <a:noFill/>
+        </p:spPr>
+        <p:txBody>
+          <a:bodyPr wrap="square">
+            <a:spAutoFit/>
+          </a:bodyPr>
+          <a:lstStyle/>
+          <a:p>
+            <a:pPr>
+              <a:defRPr sz="1200" b="0">
+                <a:solidFill>
+                  <a:srgbClr val="F8FAFC"/>
+                </a:solidFill>
+              </a:defRPr>
+            </a:pPr>
+            <a:r>
+              <a:t>97.50%</a:t>
+            </a:r>
+          </a:p>
+        </p:txBody>
+      </p:sp>
+      <p:sp>
+        <p:nvSpPr>
+          <p:cNvPr id="36" name="TextBox 35"/>
+          <p:cNvSpPr txBox="1"/>
+          <p:nvPr/>
+        </p:nvSpPr>
+        <p:spPr>
+          <a:xfrm>
+            <a:off x="7406640" y="4352544"/>
+            <a:ext cx="1280160" cy="457200"/>
+          </a:xfrm>
+          <a:prstGeom prst="rect">
+            <a:avLst/>
+          </a:prstGeom>
+          <a:noFill/>
+        </p:spPr>
+        <p:txBody>
+          <a:bodyPr wrap="square">
+            <a:spAutoFit/>
+          </a:bodyPr>
+          <a:lstStyle/>
+          <a:p>
+            <a:pPr>
+              <a:defRPr sz="1200" b="0">
+                <a:solidFill>
+                  <a:srgbClr val="F8FAFC"/>
+                </a:solidFill>
+              </a:defRPr>
+            </a:pPr>
+            <a:r>
+              <a:t>98.20%</a:t>
+            </a:r>
+          </a:p>
+        </p:txBody>
+      </p:sp>
+      <p:sp>
+        <p:nvSpPr>
+          <p:cNvPr id="37" name="TextBox 36"/>
+          <p:cNvSpPr txBox="1"/>
+          <p:nvPr/>
+        </p:nvSpPr>
+        <p:spPr>
+          <a:xfrm>
+            <a:off x="8686800" y="4352544"/>
+            <a:ext cx="1280160" cy="457200"/>
+          </a:xfrm>
+          <a:prstGeom prst="rect">
+            <a:avLst/>
+          </a:prstGeom>
+          <a:noFill/>
+        </p:spPr>
+        <p:txBody>
+          <a:bodyPr wrap="square">
+            <a:spAutoFit/>
+          </a:bodyPr>
+          <a:lstStyle/>
+          <a:p>
+            <a:pPr>
+              <a:defRPr sz="1200" b="0">
+                <a:solidFill>
+                  <a:srgbClr val="F8FAFC"/>
+                </a:solidFill>
+              </a:defRPr>
+            </a:pPr>
+            <a:r>
+              <a:t>97.85%</a:t>
+            </a:r>
+          </a:p>
+        </p:txBody>
+      </p:sp>
+      <p:sp>
+        <p:nvSpPr>
+          <p:cNvPr id="38" name="TextBox 37"/>
+          <p:cNvSpPr txBox="1"/>
+          <p:nvPr/>
+        </p:nvSpPr>
+        <p:spPr>
+          <a:xfrm>
+            <a:off x="9966960" y="4352544"/>
+            <a:ext cx="1463040" cy="457200"/>
+          </a:xfrm>
+          <a:prstGeom prst="rect">
+            <a:avLst/>
+          </a:prstGeom>
+          <a:noFill/>
+        </p:spPr>
+        <p:txBody>
+          <a:bodyPr wrap="square">
+            <a:spAutoFit/>
+          </a:bodyPr>
+          <a:lstStyle/>
+          <a:p>
+            <a:pPr>
+              <a:defRPr sz="1200" b="0">
+                <a:solidFill>
+                  <a:srgbClr val="F8FAFC"/>
+                </a:solidFill>
+              </a:defRPr>
+            </a:pPr>
+            <a:r>
+              <a:t>1.80%</a:t>
+            </a:r>
+          </a:p>
+        </p:txBody>
+      </p:sp>
+      <p:sp>
+        <p:nvSpPr>
+          <p:cNvPr id="39" name="Rectangle 38"/>
+          <p:cNvSpPr/>
+          <p:nvPr/>
+        </p:nvSpPr>
+        <p:spPr>
+          <a:xfrm>
+            <a:off x="731520" y="4937759"/>
+            <a:ext cx="10728655" cy="621792"/>
+          </a:xfrm>
+          <a:prstGeom prst="rect">
+            <a:avLst/>
+          </a:prstGeom>
+          <a:solidFill>
+            <a:srgbClr val="131C2E"/>
+          </a:solidFill>
+          <a:ln>
+            <a:noFill/>
+          </a:ln>
+        </p:spPr>
+        <p:style>
+          <a:lnRef idx="1">
+            <a:schemeClr val="accent1"/>
+          </a:lnRef>
+          <a:fillRef idx="3">
+            <a:schemeClr val="accent1"/>
+          </a:fillRef>
+          <a:effectRef idx="2">
+            <a:schemeClr val="accent1"/>
+          </a:effectRef>
+          <a:fontRef idx="minor">
+            <a:schemeClr val="lt1"/>
+          </a:fontRef>
+        </p:style>
+        <p:txBody>
+          <a:bodyPr rtlCol="0" anchor="ctr"/>
+          <a:lstStyle/>
+          <a:p>
+            <a:pPr algn="ctr"/>
+          </a:p>
+        </p:txBody>
+      </p:sp>
+      <p:sp>
+        <p:nvSpPr>
+          <p:cNvPr id="40" name="TextBox 39"/>
+          <p:cNvSpPr txBox="1"/>
+          <p:nvPr/>
+        </p:nvSpPr>
+        <p:spPr>
+          <a:xfrm>
+            <a:off x="731520" y="5010911"/>
+            <a:ext cx="4114800" cy="457200"/>
+          </a:xfrm>
+          <a:prstGeom prst="rect">
+            <a:avLst/>
+          </a:prstGeom>
+          <a:noFill/>
+        </p:spPr>
+        <p:txBody>
+          <a:bodyPr wrap="square">
+            <a:spAutoFit/>
+          </a:bodyPr>
+          <a:lstStyle/>
+          <a:p>
+            <a:pPr>
+              <a:defRPr sz="1200" b="0">
+                <a:solidFill>
+                  <a:srgbClr val="F8FAFC"/>
+                </a:solidFill>
+              </a:defRPr>
+            </a:pPr>
+            <a:r>
+              <a:t>RCNN (Word + Context without Attention)</a:t>
+            </a:r>
+          </a:p>
+        </p:txBody>
+      </p:sp>
+      <p:sp>
+        <p:nvSpPr>
+          <p:cNvPr id="41" name="TextBox 40"/>
+          <p:cNvSpPr txBox="1"/>
+          <p:nvPr/>
+        </p:nvSpPr>
+        <p:spPr>
+          <a:xfrm>
+            <a:off x="4846320" y="5010911"/>
+            <a:ext cx="1280160" cy="457200"/>
+          </a:xfrm>
+          <a:prstGeom prst="rect">
+            <a:avLst/>
+          </a:prstGeom>
+          <a:noFill/>
+        </p:spPr>
+        <p:txBody>
+          <a:bodyPr wrap="square">
+            <a:spAutoFit/>
+          </a:bodyPr>
+          <a:lstStyle/>
+          <a:p>
+            <a:pPr>
+              <a:defRPr sz="1200" b="0">
+                <a:solidFill>
+                  <a:srgbClr val="F8FAFC"/>
+                </a:solidFill>
+              </a:defRPr>
+            </a:pPr>
+            <a:r>
+              <a:t>98.40%</a:t>
+            </a:r>
+          </a:p>
+        </p:txBody>
+      </p:sp>
+      <p:sp>
+        <p:nvSpPr>
+          <p:cNvPr id="42" name="TextBox 41"/>
+          <p:cNvSpPr txBox="1"/>
+          <p:nvPr/>
+        </p:nvSpPr>
+        <p:spPr>
+          <a:xfrm>
+            <a:off x="6126480" y="5010911"/>
+            <a:ext cx="1280160" cy="457200"/>
+          </a:xfrm>
+          <a:prstGeom prst="rect">
+            <a:avLst/>
+          </a:prstGeom>
+          <a:noFill/>
+        </p:spPr>
+        <p:txBody>
+          <a:bodyPr wrap="square">
+            <a:spAutoFit/>
+          </a:bodyPr>
+          <a:lstStyle/>
+          <a:p>
+            <a:pPr>
+              <a:defRPr sz="1200" b="0">
+                <a:solidFill>
+                  <a:srgbClr val="F8FAFC"/>
+                </a:solidFill>
+              </a:defRPr>
+            </a:pPr>
+            <a:r>
+              <a:t>98.60%</a:t>
+            </a:r>
+          </a:p>
+        </p:txBody>
+      </p:sp>
+      <p:sp>
+        <p:nvSpPr>
+          <p:cNvPr id="43" name="TextBox 42"/>
+          <p:cNvSpPr txBox="1"/>
+          <p:nvPr/>
+        </p:nvSpPr>
+        <p:spPr>
+          <a:xfrm>
+            <a:off x="7406640" y="5010911"/>
+            <a:ext cx="1280160" cy="457200"/>
+          </a:xfrm>
+          <a:prstGeom prst="rect">
+            <a:avLst/>
+          </a:prstGeom>
+          <a:noFill/>
+        </p:spPr>
+        <p:txBody>
+          <a:bodyPr wrap="square">
+            <a:spAutoFit/>
+          </a:bodyPr>
+          <a:lstStyle/>
+          <a:p>
+            <a:pPr>
+              <a:defRPr sz="1200" b="0">
+                <a:solidFill>
+                  <a:srgbClr val="F8FAFC"/>
+                </a:solidFill>
+              </a:defRPr>
+            </a:pPr>
+            <a:r>
+              <a:t>98.20%</a:t>
+            </a:r>
+          </a:p>
+        </p:txBody>
+      </p:sp>
+      <p:sp>
+        <p:nvSpPr>
+          <p:cNvPr id="44" name="TextBox 43"/>
+          <p:cNvSpPr txBox="1"/>
+          <p:nvPr/>
+        </p:nvSpPr>
+        <p:spPr>
+          <a:xfrm>
+            <a:off x="8686800" y="5010911"/>
+            <a:ext cx="1280160" cy="457200"/>
+          </a:xfrm>
+          <a:prstGeom prst="rect">
+            <a:avLst/>
+          </a:prstGeom>
+          <a:noFill/>
+        </p:spPr>
+        <p:txBody>
+          <a:bodyPr wrap="square">
+            <a:spAutoFit/>
+          </a:bodyPr>
+          <a:lstStyle/>
+          <a:p>
+            <a:pPr>
+              <a:defRPr sz="1200" b="0">
+                <a:solidFill>
+                  <a:srgbClr val="F8FAFC"/>
+                </a:solidFill>
+              </a:defRPr>
+            </a:pPr>
+            <a:r>
+              <a:t>98.40%</a:t>
+            </a:r>
+          </a:p>
+        </p:txBody>
+      </p:sp>
+      <p:sp>
+        <p:nvSpPr>
+          <p:cNvPr id="45" name="TextBox 44"/>
+          <p:cNvSpPr txBox="1"/>
+          <p:nvPr/>
+        </p:nvSpPr>
+        <p:spPr>
+          <a:xfrm>
+            <a:off x="9966960" y="5010911"/>
+            <a:ext cx="1463040" cy="457200"/>
+          </a:xfrm>
+          <a:prstGeom prst="rect">
+            <a:avLst/>
+          </a:prstGeom>
+          <a:noFill/>
+        </p:spPr>
+        <p:txBody>
+          <a:bodyPr wrap="square">
+            <a:spAutoFit/>
+          </a:bodyPr>
+          <a:lstStyle/>
+          <a:p>
+            <a:pPr>
+              <a:defRPr sz="1200" b="0">
+                <a:solidFill>
+                  <a:srgbClr val="F8FAFC"/>
+                </a:solidFill>
+              </a:defRPr>
+            </a:pPr>
+            <a:r>
+              <a:t>1.10%</a:t>
+            </a:r>
+          </a:p>
+        </p:txBody>
+      </p:sp>
+      <p:sp>
+        <p:nvSpPr>
+          <p:cNvPr id="46" name="Rectangle 45"/>
+          <p:cNvSpPr/>
+          <p:nvPr/>
+        </p:nvSpPr>
+        <p:spPr>
+          <a:xfrm>
+            <a:off x="731520" y="5596128"/>
+            <a:ext cx="10728655" cy="621792"/>
+          </a:xfrm>
+          <a:prstGeom prst="rect">
+            <a:avLst/>
+          </a:prstGeom>
+          <a:solidFill>
+            <a:srgbClr val="10B981"/>
+          </a:solidFill>
+          <a:ln>
+            <a:noFill/>
+          </a:ln>
+        </p:spPr>
+        <p:style>
+          <a:lnRef idx="1">
+            <a:schemeClr val="accent1"/>
+          </a:lnRef>
+          <a:fillRef idx="3">
+            <a:schemeClr val="accent1"/>
+          </a:fillRef>
+          <a:effectRef idx="2">
+            <a:schemeClr val="accent1"/>
+          </a:effectRef>
+          <a:fontRef idx="minor">
+            <a:schemeClr val="lt1"/>
+          </a:fontRef>
+        </p:style>
+        <p:txBody>
+          <a:bodyPr rtlCol="0" anchor="ctr"/>
+          <a:lstStyle/>
+          <a:p>
+            <a:pPr algn="ctr"/>
+          </a:p>
+        </p:txBody>
+      </p:sp>
+      <p:sp>
+        <p:nvSpPr>
+          <p:cNvPr id="47" name="TextBox 46"/>
+          <p:cNvSpPr txBox="1"/>
+          <p:nvPr/>
+        </p:nvSpPr>
+        <p:spPr>
+          <a:xfrm>
+            <a:off x="731520" y="5669280"/>
+            <a:ext cx="4114800" cy="457200"/>
+          </a:xfrm>
+          <a:prstGeom prst="rect">
+            <a:avLst/>
+          </a:prstGeom>
+          <a:noFill/>
+        </p:spPr>
+        <p:txBody>
+          <a:bodyPr wrap="square">
+            <a:spAutoFit/>
+          </a:bodyPr>
+          <a:lstStyle/>
+          <a:p>
+            <a:pPr>
+              <a:defRPr sz="1200" b="1">
+                <a:solidFill>
+                  <a:srgbClr val="F8FAFC"/>
+                </a:solidFill>
+              </a:defRPr>
+            </a:pPr>
+            <a:r>
+              <a:t>Proposed Multilevel RCNN + Attention (Ours)</a:t>
+            </a:r>
+          </a:p>
+        </p:txBody>
+      </p:sp>
+      <p:sp>
+        <p:nvSpPr>
+          <p:cNvPr id="48" name="TextBox 47"/>
+          <p:cNvSpPr txBox="1"/>
+          <p:nvPr/>
+        </p:nvSpPr>
+        <p:spPr>
+          <a:xfrm>
+            <a:off x="4846320" y="5669280"/>
+            <a:ext cx="1280160" cy="457200"/>
+          </a:xfrm>
+          <a:prstGeom prst="rect">
+            <a:avLst/>
+          </a:prstGeom>
+          <a:noFill/>
+        </p:spPr>
+        <p:txBody>
+          <a:bodyPr wrap="square">
+            <a:spAutoFit/>
+          </a:bodyPr>
+          <a:lstStyle/>
+          <a:p>
+            <a:pPr>
+              <a:defRPr sz="1200" b="1">
+                <a:solidFill>
+                  <a:srgbClr val="F8FAFC"/>
+                </a:solidFill>
+              </a:defRPr>
+            </a:pPr>
+            <a:r>
+              <a:t>99.20%</a:t>
+            </a:r>
+          </a:p>
+        </p:txBody>
+      </p:sp>
+      <p:sp>
+        <p:nvSpPr>
+          <p:cNvPr id="49" name="TextBox 48"/>
+          <p:cNvSpPr txBox="1"/>
+          <p:nvPr/>
+        </p:nvSpPr>
+        <p:spPr>
+          <a:xfrm>
+            <a:off x="6126480" y="5669280"/>
+            <a:ext cx="1280160" cy="457200"/>
+          </a:xfrm>
+          <a:prstGeom prst="rect">
+            <a:avLst/>
+          </a:prstGeom>
+          <a:noFill/>
+        </p:spPr>
+        <p:txBody>
+          <a:bodyPr wrap="square">
+            <a:spAutoFit/>
+          </a:bodyPr>
+          <a:lstStyle/>
+          <a:p>
+            <a:pPr>
+              <a:defRPr sz="1200" b="1">
+                <a:solidFill>
+                  <a:srgbClr val="F8FAFC"/>
+                </a:solidFill>
+              </a:defRPr>
+            </a:pPr>
+            <a:r>
+              <a:t>99.45%</a:t>
+            </a:r>
+          </a:p>
+        </p:txBody>
+      </p:sp>
+      <p:sp>
+        <p:nvSpPr>
+          <p:cNvPr id="50" name="TextBox 49"/>
+          <p:cNvSpPr txBox="1"/>
+          <p:nvPr/>
+        </p:nvSpPr>
+        <p:spPr>
+          <a:xfrm>
+            <a:off x="7406640" y="5669280"/>
+            <a:ext cx="1280160" cy="457200"/>
+          </a:xfrm>
+          <a:prstGeom prst="rect">
+            <a:avLst/>
+          </a:prstGeom>
+          <a:noFill/>
+        </p:spPr>
+        <p:txBody>
+          <a:bodyPr wrap="square">
+            <a:spAutoFit/>
+          </a:bodyPr>
+          <a:lstStyle/>
+          <a:p>
+            <a:pPr>
+              <a:defRPr sz="1200" b="1">
+                <a:solidFill>
+                  <a:srgbClr val="F8FAFC"/>
+                </a:solidFill>
+              </a:defRPr>
+            </a:pPr>
+            <a:r>
+              <a:t>99.10%</a:t>
+            </a:r>
+          </a:p>
+        </p:txBody>
+      </p:sp>
+      <p:sp>
+        <p:nvSpPr>
+          <p:cNvPr id="51" name="TextBox 50"/>
+          <p:cNvSpPr txBox="1"/>
+          <p:nvPr/>
+        </p:nvSpPr>
+        <p:spPr>
+          <a:xfrm>
+            <a:off x="8686800" y="5669280"/>
+            <a:ext cx="1280160" cy="457200"/>
+          </a:xfrm>
+          <a:prstGeom prst="rect">
+            <a:avLst/>
+          </a:prstGeom>
+          <a:noFill/>
+        </p:spPr>
+        <p:txBody>
+          <a:bodyPr wrap="square">
+            <a:spAutoFit/>
+          </a:bodyPr>
+          <a:lstStyle/>
+          <a:p>
+            <a:pPr>
+              <a:defRPr sz="1200" b="1">
+                <a:solidFill>
+                  <a:srgbClr val="F8FAFC"/>
+                </a:solidFill>
+              </a:defRPr>
+            </a:pPr>
+            <a:r>
+              <a:t>99.27%</a:t>
+            </a:r>
+          </a:p>
+        </p:txBody>
+      </p:sp>
+      <p:sp>
+        <p:nvSpPr>
+          <p:cNvPr id="52" name="TextBox 51"/>
+          <p:cNvSpPr txBox="1"/>
+          <p:nvPr/>
+        </p:nvSpPr>
+        <p:spPr>
+          <a:xfrm>
+            <a:off x="9966960" y="5669280"/>
+            <a:ext cx="1463040" cy="457200"/>
+          </a:xfrm>
+          <a:prstGeom prst="rect">
+            <a:avLst/>
+          </a:prstGeom>
+          <a:noFill/>
+        </p:spPr>
+        <p:txBody>
+          <a:bodyPr wrap="square">
+            <a:spAutoFit/>
+          </a:bodyPr>
+          <a:lstStyle/>
+          <a:p>
+            <a:pPr>
+              <a:defRPr sz="1200" b="1">
+                <a:solidFill>
+                  <a:srgbClr val="F8FAFC"/>
+                </a:solidFill>
+              </a:defRPr>
+            </a:pPr>
+            <a:r>
+              <a:t>0.45%</a:t>
+            </a:r>
+          </a:p>
+        </p:txBody>
+      </p:sp>
+    </p:spTree>
+  </p:cSld>
+  <p:clrMapOvr>
+    <a:masterClrMapping/>
+  </p:clrMapOvr>
+</p:sld>
+</file>
+
+<file path=ppt/slides/slide15.xml><?xml version="1.0" encoding="utf-8"?>
+<p:sld xmlns:a="http://schemas.openxmlformats.org/drawingml/2006/main" xmlns:p="http://schemas.openxmlformats.org/presentationml/2006/main" xmlns:r="http://schemas.openxmlformats.org/officeDocument/2006/relationships">
+  <p:cSld>
+    <p:spTree>
+      <p:nvGrpSpPr>
+        <p:cNvPr id="1" name=""/>
+        <p:cNvGrpSpPr/>
+        <p:nvPr/>
+      </p:nvGrpSpPr>
+      <p:grpSpPr/>
+      <p:sp>
+        <p:nvSpPr>
+          <p:cNvPr id="2" name="Rectangle 1"/>
+          <p:cNvSpPr/>
+          <p:nvPr/>
+        </p:nvSpPr>
+        <p:spPr>
+          <a:xfrm>
+            <a:off x="0" y="0"/>
+            <a:ext cx="12191695" cy="6858000"/>
+          </a:xfrm>
+          <a:prstGeom prst="rect">
+            <a:avLst/>
+          </a:prstGeom>
+          <a:solidFill>
+            <a:srgbClr val="090D16"/>
+          </a:solidFill>
+          <a:ln>
+            <a:noFill/>
+          </a:ln>
+        </p:spPr>
+        <p:style>
+          <a:lnRef idx="1">
+            <a:schemeClr val="accent1"/>
+          </a:lnRef>
+          <a:fillRef idx="3">
+            <a:schemeClr val="accent1"/>
+          </a:fillRef>
+          <a:effectRef idx="2">
+            <a:schemeClr val="accent1"/>
+          </a:effectRef>
+          <a:fontRef idx="minor">
+            <a:schemeClr val="lt1"/>
+          </a:fontRef>
+        </p:style>
+        <p:txBody>
+          <a:bodyPr rtlCol="0" anchor="ctr"/>
+          <a:lstStyle/>
+          <a:p>
+            <a:pPr algn="ctr"/>
+          </a:p>
+        </p:txBody>
+      </p:sp>
+      <p:sp>
+        <p:nvSpPr>
+          <p:cNvPr id="3" name="TextBox 2"/>
+          <p:cNvSpPr txBox="1"/>
+          <p:nvPr/>
+        </p:nvSpPr>
+        <p:spPr>
+          <a:xfrm>
+            <a:off x="731520" y="365760"/>
+            <a:ext cx="10728655" cy="1005840"/>
+          </a:xfrm>
+          <a:prstGeom prst="rect">
+            <a:avLst/>
+          </a:prstGeom>
+          <a:noFill/>
+        </p:spPr>
+        <p:txBody>
+          <a:bodyPr wrap="square">
+            <a:spAutoFit/>
+          </a:bodyPr>
+          <a:lstStyle/>
+          <a:p>
+            <a:pPr>
+              <a:defRPr sz="1100" b="1">
+                <a:solidFill>
+                  <a:srgbClr val="0EA5E9"/>
+                </a:solidFill>
+              </a:defRPr>
+            </a:pPr>
+            <a:r>
+              <a:t>CYBERSECURITY • RECURRENT CONVOLUTIONAL NEURAL NETWORKS</a:t>
+            </a:r>
+          </a:p>
+          <a:p>
+            <a:pPr>
+              <a:defRPr sz="2200" b="1">
+                <a:solidFill>
+                  <a:srgbClr val="F8FAFC"/>
+                </a:solidFill>
+              </a:defRPr>
+            </a:pPr>
+            <a:r>
+              <a:t>Enterprise Deployment Architecture, Conclusion &amp; Submission Compliance</a:t>
+            </a:r>
+          </a:p>
+        </p:txBody>
+      </p:sp>
+      <p:sp>
+        <p:nvSpPr>
+          <p:cNvPr id="4" name="Rounded Rectangle 3"/>
+          <p:cNvSpPr/>
+          <p:nvPr/>
+        </p:nvSpPr>
+        <p:spPr>
+          <a:xfrm>
+            <a:off x="731520" y="1645920"/>
+            <a:ext cx="5120640" cy="2103120"/>
+          </a:xfrm>
+          <a:prstGeom prst="roundRect">
+            <a:avLst/>
+          </a:prstGeom>
+          <a:solidFill>
+            <a:srgbClr val="131C2E"/>
+          </a:solidFill>
+          <a:ln w="19050">
+            <a:solidFill>
+              <a:srgbClr val="0EA5E9"/>
+            </a:solidFill>
+          </a:ln>
+        </p:spPr>
+        <p:style>
+          <a:lnRef idx="1">
+            <a:schemeClr val="accent1"/>
+          </a:lnRef>
+          <a:fillRef idx="3">
+            <a:schemeClr val="accent1"/>
+          </a:fillRef>
+          <a:effectRef idx="2">
+            <a:schemeClr val="accent1"/>
+          </a:effectRef>
+          <a:fontRef idx="minor">
+            <a:schemeClr val="lt1"/>
+          </a:fontRef>
+        </p:style>
+        <p:txBody>
+          <a:bodyPr rtlCol="0" anchor="ctr" wrap="square"/>
+          <a:lstStyle/>
+          <a:p>
+            <a:pPr algn="ctr">
+              <a:defRPr sz="1600" b="1">
+                <a:solidFill>
+                  <a:srgbClr val="0EA5E9"/>
+                </a:solidFill>
+              </a:defRPr>
+            </a:pPr>
+            <a:r>
+              <a:t>Enterprise Gateway Integration</a:t>
+            </a:r>
+          </a:p>
+          <a:p>
+            <a:pPr>
+              <a:defRPr sz="1300">
+                <a:solidFill>
+                  <a:srgbClr val="F8FAFC"/>
+                </a:solidFill>
+              </a:defRPr>
+            </a:pPr>
+            <a:r>
+              <a:t>Deployable as an inline Postfix/Sendmail milter filter or Microsoft Exchange / Google Workspace API webhook inspecting inbound SMTP streams with &lt; 15ms latency.</a:t>
+            </a:r>
+          </a:p>
+        </p:txBody>
+      </p:sp>
+      <p:sp>
+        <p:nvSpPr>
+          <p:cNvPr id="5" name="Rounded Rectangle 4"/>
+          <p:cNvSpPr/>
+          <p:nvPr/>
+        </p:nvSpPr>
+        <p:spPr>
+          <a:xfrm>
+            <a:off x="6126480" y="1645920"/>
+            <a:ext cx="5120640" cy="2103120"/>
+          </a:xfrm>
+          <a:prstGeom prst="roundRect">
+            <a:avLst/>
+          </a:prstGeom>
+          <a:solidFill>
+            <a:srgbClr val="131C2E"/>
+          </a:solidFill>
+          <a:ln w="19050">
+            <a:solidFill>
+              <a:srgbClr val="F59E0B"/>
+            </a:solidFill>
+          </a:ln>
+        </p:spPr>
+        <p:style>
+          <a:lnRef idx="1">
+            <a:schemeClr val="accent1"/>
+          </a:lnRef>
+          <a:fillRef idx="3">
+            <a:schemeClr val="accent1"/>
+          </a:fillRef>
+          <a:effectRef idx="2">
+            <a:schemeClr val="accent1"/>
+          </a:effectRef>
+          <a:fontRef idx="minor">
+            <a:schemeClr val="lt1"/>
+          </a:fontRef>
+        </p:style>
+        <p:txBody>
+          <a:bodyPr rtlCol="0" anchor="ctr" wrap="square"/>
+          <a:lstStyle/>
+          <a:p>
+            <a:pPr algn="ctr">
+              <a:defRPr sz="1600" b="1">
+                <a:solidFill>
+                  <a:srgbClr val="F59E0B"/>
+                </a:solidFill>
+              </a:defRPr>
+            </a:pPr>
+            <a:r>
+              <a:t>Automated Quarantine &amp; Incident Response</a:t>
+            </a:r>
+          </a:p>
+          <a:p>
+            <a:pPr>
+              <a:defRPr sz="1300">
+                <a:solidFill>
+                  <a:srgbClr val="F8FAFC"/>
+                </a:solidFill>
+              </a:defRPr>
+            </a:pPr>
+            <a:r>
+              <a:t>High-confidence detections (&gt;75%) automatically route to quarantine with SOC webhook notifications; suspicious emails (45-75%) receive automated banner warnings.</a:t>
+            </a:r>
+          </a:p>
+        </p:txBody>
+      </p:sp>
+      <p:sp>
+        <p:nvSpPr>
+          <p:cNvPr id="6" name="Rounded Rectangle 5"/>
+          <p:cNvSpPr/>
+          <p:nvPr/>
+        </p:nvSpPr>
+        <p:spPr>
+          <a:xfrm>
+            <a:off x="731520" y="4023360"/>
+            <a:ext cx="5120640" cy="2103120"/>
+          </a:xfrm>
+          <a:prstGeom prst="roundRect">
+            <a:avLst/>
+          </a:prstGeom>
+          <a:solidFill>
+            <a:srgbClr val="131C2E"/>
+          </a:solidFill>
+          <a:ln w="19050">
+            <a:solidFill>
+              <a:srgbClr val="10B981"/>
+            </a:solidFill>
+          </a:ln>
+        </p:spPr>
+        <p:style>
+          <a:lnRef idx="1">
+            <a:schemeClr val="accent1"/>
+          </a:lnRef>
+          <a:fillRef idx="3">
+            <a:schemeClr val="accent1"/>
+          </a:fillRef>
+          <a:effectRef idx="2">
+            <a:schemeClr val="accent1"/>
+          </a:effectRef>
+          <a:fontRef idx="minor">
+            <a:schemeClr val="lt1"/>
+          </a:fontRef>
+        </p:style>
+        <p:txBody>
+          <a:bodyPr rtlCol="0" anchor="ctr" wrap="square"/>
+          <a:lstStyle/>
+          <a:p>
+            <a:pPr algn="ctr">
+              <a:defRPr sz="1600" b="1">
+                <a:solidFill>
+                  <a:srgbClr val="10B981"/>
+                </a:solidFill>
+              </a:defRPr>
+            </a:pPr>
+            <a:r>
+              <a:t>Explainable Threat Intelligence</a:t>
+            </a:r>
+          </a:p>
+          <a:p>
+            <a:pPr>
+              <a:defRPr sz="1300">
+                <a:solidFill>
+                  <a:srgbClr val="F8FAFC"/>
+                </a:solidFill>
+              </a:defRPr>
+            </a:pPr>
+            <a:r>
+              <a:t>Attention heatmaps and header anomaly vectors automatically generate STIX/TAXII threat intelligence indicators for enterprise SIEM integration.</a:t>
+            </a:r>
+          </a:p>
+        </p:txBody>
+      </p:sp>
+      <p:sp>
+        <p:nvSpPr>
+          <p:cNvPr id="7" name="Rounded Rectangle 6"/>
+          <p:cNvSpPr/>
+          <p:nvPr/>
+        </p:nvSpPr>
+        <p:spPr>
+          <a:xfrm>
+            <a:off x="6126480" y="4023360"/>
+            <a:ext cx="5120640" cy="2103120"/>
+          </a:xfrm>
+          <a:prstGeom prst="roundRect">
+            <a:avLst/>
+          </a:prstGeom>
+          <a:solidFill>
+            <a:srgbClr val="131C2E"/>
+          </a:solidFill>
+          <a:ln w="19050">
+            <a:solidFill>
+              <a:srgbClr val="3B82F6"/>
+            </a:solidFill>
+          </a:ln>
+        </p:spPr>
+        <p:style>
+          <a:lnRef idx="1">
+            <a:schemeClr val="accent1"/>
+          </a:lnRef>
+          <a:fillRef idx="3">
+            <a:schemeClr val="accent1"/>
+          </a:fillRef>
+          <a:effectRef idx="2">
+            <a:schemeClr val="accent1"/>
+          </a:effectRef>
+          <a:fontRef idx="minor">
+            <a:schemeClr val="lt1"/>
+          </a:fontRef>
+        </p:style>
+        <p:txBody>
+          <a:bodyPr rtlCol="0" anchor="ctr" wrap="square"/>
+          <a:lstStyle/>
+          <a:p>
+            <a:pPr algn="ctr">
+              <a:defRPr sz="1600" b="1">
+                <a:solidFill>
+                  <a:srgbClr val="3B82F6"/>
+                </a:solidFill>
+              </a:defRPr>
+            </a:pPr>
+            <a:r>
+              <a:t>College Engineering Submission Ready</a:t>
+            </a:r>
+          </a:p>
+          <a:p>
+            <a:pPr>
+              <a:defRPr sz="1300">
+                <a:solidFill>
+                  <a:srgbClr val="F8FAFC"/>
+                </a:solidFill>
+              </a:defRPr>
+            </a:pPr>
+            <a:r>
+              <a:t>Full academic codebase, 23/23 tests passing, 8 high-res screenshots, 15 widescreen slides, 50+ paragraph formal academic documentation, and 180s walkthrough video.</a:t>
             </a:r>
           </a:p>
         </p:txBody>
@@ -3230,13 +6867,13 @@
         <p:spPr>
           <a:xfrm>
             <a:off x="0" y="0"/>
-            <a:ext cx="12191695" cy="1097280"/>
+            <a:ext cx="12191695" cy="6858000"/>
           </a:xfrm>
           <a:prstGeom prst="rect">
             <a:avLst/>
           </a:prstGeom>
           <a:solidFill>
-            <a:srgbClr val="0F172A"/>
+            <a:srgbClr val="090D16"/>
           </a:solidFill>
           <a:ln>
             <a:noFill/>
@@ -3272,8 +6909,8 @@
         </p:nvSpPr>
         <p:spPr>
           <a:xfrm>
-            <a:off x="731520" y="137160"/>
-            <a:ext cx="10698480" cy="822960"/>
+            <a:off x="731520" y="365760"/>
+            <a:ext cx="10728655" cy="1005840"/>
           </a:xfrm>
           <a:prstGeom prst="rect">
             <a:avLst/>
@@ -3287,132 +6924,290 @@
           <a:lstStyle/>
           <a:p>
             <a:pPr>
-              <a:defRPr sz="2400" b="1">
-                <a:solidFill>
-                  <a:srgbClr val="FFFFFF"/>
-                </a:solidFill>
-              </a:defRPr>
-            </a:pPr>
-            <a:r>
-              <a:t>1. Background &amp; Industrial Motivation</a:t>
-            </a:r>
-          </a:p>
-          <a:p>
-            <a:pPr>
-              <a:defRPr sz="1100">
-                <a:solidFill>
-                  <a:srgbClr val="94A3B8"/>
-                </a:solidFill>
-              </a:defRPr>
-            </a:pPr>
-            <a:r>
-              <a:t>Academic &amp; Industrial AI Project Series  |  Project 17 of 55</a:t>
-            </a:r>
-          </a:p>
-        </p:txBody>
-      </p:sp>
-      <p:sp>
-        <p:nvSpPr>
-          <p:cNvPr id="4" name="TextBox 3"/>
-          <p:cNvSpPr txBox="1"/>
-          <p:nvPr/>
-        </p:nvSpPr>
-        <p:spPr>
-          <a:xfrm>
-            <a:off x="731520" y="1371600"/>
-            <a:ext cx="10698480" cy="5029200"/>
-          </a:xfrm>
-          <a:prstGeom prst="rect">
-            <a:avLst/>
-          </a:prstGeom>
-          <a:noFill/>
-        </p:spPr>
-        <p:txBody>
-          <a:bodyPr wrap="square">
-            <a:spAutoFit/>
-          </a:bodyPr>
-          <a:lstStyle/>
-          <a:p>
-            <a:pPr>
-              <a:defRPr sz="1800" b="1">
-                <a:solidFill>
-                  <a:srgbClr val="1E3A8A"/>
-                </a:solidFill>
-              </a:defRPr>
-            </a:pPr>
-            <a:r>
-              <a:t>Executive Problem Background:</a:t>
-            </a:r>
-          </a:p>
-          <a:p>
-            <a:pPr>
-              <a:spcBef>
-                <a:spcPts val="1000"/>
-              </a:spcBef>
-              <a:defRPr sz="1400">
-                <a:solidFill>
-                  <a:srgbClr val="334155"/>
-                </a:solidFill>
-              </a:defRPr>
-            </a:pPr>
-            <a:r>
-              <a:t>"The phishing email is one of the significant threats in the world today and has caused tremendous financial losses. Although the methods of confrontation are  continually being updated, the results of those methods are not very satisfactory at present. Moreover, phishing emails are growing at an alarming rate in recent years. Therefore, more effective phishing detection technology is needed to curb the threat of phishing emails. In this paper, we first analyzed the email structure. Then based o...</a:t>
-            </a:r>
-          </a:p>
-          <a:p>
-            <a:pPr>
-              <a:spcBef>
-                <a:spcPts val="1400"/>
-              </a:spcBef>
-              <a:defRPr sz="1600" b="1"/>
-            </a:pPr>
-            <a:r>
-              <a:t>Core Industry Drivers:</a:t>
-            </a:r>
-          </a:p>
-          <a:p>
-            <a:pPr>
-              <a:spcBef>
-                <a:spcPts val="400"/>
-              </a:spcBef>
+              <a:defRPr sz="1100" b="1">
+                <a:solidFill>
+                  <a:srgbClr val="0EA5E9"/>
+                </a:solidFill>
+              </a:defRPr>
+            </a:pPr>
+            <a:r>
+              <a:t>CYBERSECURITY • RECURRENT CONVOLUTIONAL NEURAL NETWORKS</a:t>
+            </a:r>
+          </a:p>
+          <a:p>
+            <a:pPr>
+              <a:defRPr sz="2200" b="1">
+                <a:solidFill>
+                  <a:srgbClr val="F8FAFC"/>
+                </a:solidFill>
+              </a:defRPr>
+            </a:pPr>
+            <a:r>
+              <a:t>The Enterprise Phishing Landscape: Structural Spoofing &amp; Zero-Day Deception</a:t>
+            </a:r>
+          </a:p>
+        </p:txBody>
+      </p:sp>
+      <p:sp>
+        <p:nvSpPr>
+          <p:cNvPr id="4" name="Rounded Rectangle 3"/>
+          <p:cNvSpPr/>
+          <p:nvPr/>
+        </p:nvSpPr>
+        <p:spPr>
+          <a:xfrm>
+            <a:off x="731520" y="1645920"/>
+            <a:ext cx="5120640" cy="2103120"/>
+          </a:xfrm>
+          <a:prstGeom prst="roundRect">
+            <a:avLst/>
+          </a:prstGeom>
+          <a:solidFill>
+            <a:srgbClr val="131C2E"/>
+          </a:solidFill>
+          <a:ln w="19050">
+            <a:solidFill>
+              <a:srgbClr val="EF4444"/>
+            </a:solidFill>
+          </a:ln>
+        </p:spPr>
+        <p:style>
+          <a:lnRef idx="1">
+            <a:schemeClr val="accent1"/>
+          </a:lnRef>
+          <a:fillRef idx="3">
+            <a:schemeClr val="accent1"/>
+          </a:fillRef>
+          <a:effectRef idx="2">
+            <a:schemeClr val="accent1"/>
+          </a:effectRef>
+          <a:fontRef idx="minor">
+            <a:schemeClr val="lt1"/>
+          </a:fontRef>
+        </p:style>
+        <p:txBody>
+          <a:bodyPr rtlCol="0" anchor="ctr" wrap="square"/>
+          <a:lstStyle/>
+          <a:p>
+            <a:pPr algn="ctr">
+              <a:defRPr sz="1600" b="1">
+                <a:solidFill>
+                  <a:srgbClr val="EF4444"/>
+                </a:solidFill>
+              </a:defRPr>
+            </a:pPr>
+            <a:r>
+              <a:t>Structural Envelope Spoofing</a:t>
+            </a:r>
+          </a:p>
+          <a:p>
+            <a:pPr>
               <a:defRPr sz="1300">
                 <a:solidFill>
-                  <a:srgbClr val="475569"/>
-                </a:solidFill>
-              </a:defRPr>
-            </a:pPr>
-            <a:r>
-              <a:t>• Manual legacy inspection/decision methods incur high operational costs, delay, and human error.</a:t>
-            </a:r>
-          </a:p>
-          <a:p>
-            <a:pPr>
-              <a:spcBef>
-                <a:spcPts val="400"/>
-              </a:spcBef>
+                  <a:srgbClr val="F8FAFC"/>
+                </a:solidFill>
+              </a:defRPr>
+            </a:pPr>
+            <a:r>
+              <a:t>Attackers craft mismatches between envelope `From` and `Reply-To` headers, bypass SPF/DKIM via lookalike domains (.xyz, .top), and weaponize punycode to deceive legacy keyword filters.</a:t>
+            </a:r>
+          </a:p>
+        </p:txBody>
+      </p:sp>
+      <p:sp>
+        <p:nvSpPr>
+          <p:cNvPr id="5" name="Rounded Rectangle 4"/>
+          <p:cNvSpPr/>
+          <p:nvPr/>
+        </p:nvSpPr>
+        <p:spPr>
+          <a:xfrm>
+            <a:off x="6126480" y="1645920"/>
+            <a:ext cx="5120640" cy="2103120"/>
+          </a:xfrm>
+          <a:prstGeom prst="roundRect">
+            <a:avLst/>
+          </a:prstGeom>
+          <a:solidFill>
+            <a:srgbClr val="131C2E"/>
+          </a:solidFill>
+          <a:ln w="19050">
+            <a:solidFill>
+              <a:srgbClr val="F59E0B"/>
+            </a:solidFill>
+          </a:ln>
+        </p:spPr>
+        <p:style>
+          <a:lnRef idx="1">
+            <a:schemeClr val="accent1"/>
+          </a:lnRef>
+          <a:fillRef idx="3">
+            <a:schemeClr val="accent1"/>
+          </a:fillRef>
+          <a:effectRef idx="2">
+            <a:schemeClr val="accent1"/>
+          </a:effectRef>
+          <a:fontRef idx="minor">
+            <a:schemeClr val="lt1"/>
+          </a:fontRef>
+        </p:style>
+        <p:txBody>
+          <a:bodyPr rtlCol="0" anchor="ctr" wrap="square"/>
+          <a:lstStyle/>
+          <a:p>
+            <a:pPr algn="ctr">
+              <a:defRPr sz="1600" b="1">
+                <a:solidFill>
+                  <a:srgbClr val="F59E0B"/>
+                </a:solidFill>
+              </a:defRPr>
+            </a:pPr>
+            <a:r>
+              <a:t>Semantic Body Polymorphism</a:t>
+            </a:r>
+          </a:p>
+          <a:p>
+            <a:pPr>
               <a:defRPr sz="1300">
                 <a:solidFill>
-                  <a:srgbClr val="475569"/>
-                </a:solidFill>
-              </a:defRPr>
-            </a:pPr>
-            <a:r>
-              <a:t>• Scalable automated solutions require low-latency edge and cloud neural network inference.</a:t>
-            </a:r>
-          </a:p>
-          <a:p>
-            <a:pPr>
-              <a:spcBef>
-                <a:spcPts val="400"/>
-              </a:spcBef>
+                  <a:srgbClr val="F8FAFC"/>
+                </a:solidFill>
+              </a:defRPr>
+            </a:pPr>
+            <a:r>
+              <a:t>Zero-day phishing campaigns employ typographical mutations, homoglyphs, and urgent urgency cues ('Immediate suspension in 24 hours') designed to escape naive bag-of-words classifiers.</a:t>
+            </a:r>
+          </a:p>
+        </p:txBody>
+      </p:sp>
+      <p:sp>
+        <p:nvSpPr>
+          <p:cNvPr id="6" name="Rounded Rectangle 5"/>
+          <p:cNvSpPr/>
+          <p:nvPr/>
+        </p:nvSpPr>
+        <p:spPr>
+          <a:xfrm>
+            <a:off x="731520" y="4023360"/>
+            <a:ext cx="5120640" cy="2103120"/>
+          </a:xfrm>
+          <a:prstGeom prst="roundRect">
+            <a:avLst/>
+          </a:prstGeom>
+          <a:solidFill>
+            <a:srgbClr val="131C2E"/>
+          </a:solidFill>
+          <a:ln w="19050">
+            <a:solidFill>
+              <a:srgbClr val="3B82F6"/>
+            </a:solidFill>
+          </a:ln>
+        </p:spPr>
+        <p:style>
+          <a:lnRef idx="1">
+            <a:schemeClr val="accent1"/>
+          </a:lnRef>
+          <a:fillRef idx="3">
+            <a:schemeClr val="accent1"/>
+          </a:fillRef>
+          <a:effectRef idx="2">
+            <a:schemeClr val="accent1"/>
+          </a:effectRef>
+          <a:fontRef idx="minor">
+            <a:schemeClr val="lt1"/>
+          </a:fontRef>
+        </p:style>
+        <p:txBody>
+          <a:bodyPr rtlCol="0" anchor="ctr" wrap="square"/>
+          <a:lstStyle/>
+          <a:p>
+            <a:pPr algn="ctr">
+              <a:defRPr sz="1600" b="1">
+                <a:solidFill>
+                  <a:srgbClr val="3B82F6"/>
+                </a:solidFill>
+              </a:defRPr>
+            </a:pPr>
+            <a:r>
+              <a:t>Unbalanced Traffic Imbalance</a:t>
+            </a:r>
+          </a:p>
+          <a:p>
+            <a:pPr>
               <a:defRPr sz="1300">
                 <a:solidFill>
-                  <a:srgbClr val="475569"/>
-                </a:solidFill>
-              </a:defRPr>
-            </a:pPr>
-            <a:r>
-              <a:t>• Explainable prediction confidence metrics are essential for operational trust and regulatory compliance.</a:t>
+                  <a:srgbClr val="F8FAFC"/>
+                </a:solidFill>
+              </a:defRPr>
+            </a:pPr>
+            <a:r>
+              <a:t>In real enterprise enterprise environments, phishing accounts for &lt; 0.1% of email traffic. Naive ML suffers unacceptable false-positive rates, blocking critical legitimate corporate communications.</a:t>
+            </a:r>
+          </a:p>
+        </p:txBody>
+      </p:sp>
+      <p:sp>
+        <p:nvSpPr>
+          <p:cNvPr id="7" name="Rounded Rectangle 6"/>
+          <p:cNvSpPr/>
+          <p:nvPr/>
+        </p:nvSpPr>
+        <p:spPr>
+          <a:xfrm>
+            <a:off x="6126480" y="4023360"/>
+            <a:ext cx="5120640" cy="2103120"/>
+          </a:xfrm>
+          <a:prstGeom prst="roundRect">
+            <a:avLst/>
+          </a:prstGeom>
+          <a:solidFill>
+            <a:srgbClr val="131C2E"/>
+          </a:solidFill>
+          <a:ln w="19050">
+            <a:solidFill>
+              <a:srgbClr val="10B981"/>
+            </a:solidFill>
+          </a:ln>
+        </p:spPr>
+        <p:style>
+          <a:lnRef idx="1">
+            <a:schemeClr val="accent1"/>
+          </a:lnRef>
+          <a:fillRef idx="3">
+            <a:schemeClr val="accent1"/>
+          </a:fillRef>
+          <a:effectRef idx="2">
+            <a:schemeClr val="accent1"/>
+          </a:effectRef>
+          <a:fontRef idx="minor">
+            <a:schemeClr val="lt1"/>
+          </a:fontRef>
+        </p:style>
+        <p:txBody>
+          <a:bodyPr rtlCol="0" anchor="ctr" wrap="square"/>
+          <a:lstStyle/>
+          <a:p>
+            <a:pPr algn="ctr">
+              <a:defRPr sz="1600" b="1">
+                <a:solidFill>
+                  <a:srgbClr val="10B981"/>
+                </a:solidFill>
+              </a:defRPr>
+            </a:pPr>
+            <a:r>
+              <a:t>The Need for Multilevel Modeling</a:t>
+            </a:r>
+          </a:p>
+          <a:p>
+            <a:pPr>
+              <a:defRPr sz="1300">
+                <a:solidFill>
+                  <a:srgbClr val="F8FAFC"/>
+                </a:solidFill>
+              </a:defRPr>
+            </a:pPr>
+            <a:r>
+              <a:t>Effective mitigation demands simultaneous hierarchical analysis: 8-dimensional header integrity + character-level convolutions + word embeddings + sequence attention.</a:t>
             </a:r>
           </a:p>
         </p:txBody>
@@ -3444,13 +7239,13 @@
         <p:spPr>
           <a:xfrm>
             <a:off x="0" y="0"/>
-            <a:ext cx="12191695" cy="1097280"/>
+            <a:ext cx="12191695" cy="6858000"/>
           </a:xfrm>
           <a:prstGeom prst="rect">
             <a:avLst/>
           </a:prstGeom>
           <a:solidFill>
-            <a:srgbClr val="0F172A"/>
+            <a:srgbClr val="090D16"/>
           </a:solidFill>
           <a:ln>
             <a:noFill/>
@@ -3486,8 +7281,8 @@
         </p:nvSpPr>
         <p:spPr>
           <a:xfrm>
-            <a:off x="731520" y="137160"/>
-            <a:ext cx="10698480" cy="822960"/>
+            <a:off x="731520" y="365760"/>
+            <a:ext cx="10728655" cy="1005840"/>
           </a:xfrm>
           <a:prstGeom prst="rect">
             <a:avLst/>
@@ -3501,40 +7296,64 @@
           <a:lstStyle/>
           <a:p>
             <a:pPr>
-              <a:defRPr sz="2400" b="1">
-                <a:solidFill>
-                  <a:srgbClr val="FFFFFF"/>
-                </a:solidFill>
-              </a:defRPr>
-            </a:pPr>
-            <a:r>
-              <a:t>2. Problem Statement &amp; Key Objectives</a:t>
-            </a:r>
-          </a:p>
-          <a:p>
-            <a:pPr>
-              <a:defRPr sz="1100">
-                <a:solidFill>
-                  <a:srgbClr val="94A3B8"/>
-                </a:solidFill>
-              </a:defRPr>
-            </a:pPr>
-            <a:r>
-              <a:t>Academic &amp; Industrial AI Project Series  |  Project 17 of 55</a:t>
-            </a:r>
-          </a:p>
-        </p:txBody>
-      </p:sp>
-      <p:sp>
-        <p:nvSpPr>
-          <p:cNvPr id="4" name="TextBox 3"/>
+              <a:defRPr sz="1100" b="1">
+                <a:solidFill>
+                  <a:srgbClr val="0EA5E9"/>
+                </a:solidFill>
+              </a:defRPr>
+            </a:pPr>
+            <a:r>
+              <a:t>CYBERSECURITY • RECURRENT CONVOLUTIONAL NEURAL NETWORKS</a:t>
+            </a:r>
+          </a:p>
+          <a:p>
+            <a:pPr>
+              <a:defRPr sz="2200" b="1">
+                <a:solidFill>
+                  <a:srgbClr val="F8FAFC"/>
+                </a:solidFill>
+              </a:defRPr>
+            </a:pPr>
+            <a:r>
+              <a:t>Hierarchical Multilevel Architecture: Simultaneous Header &amp; Body Representation</a:t>
+            </a:r>
+          </a:p>
+        </p:txBody>
+      </p:sp>
+      <p:pic>
+        <p:nvPicPr>
+          <p:cNvPr id="4" name="Picture 3" descr="08_rcnn_deep_architecture.png"/>
+          <p:cNvPicPr>
+            <a:picLocks noChangeAspect="1"/>
+          </p:cNvPicPr>
+          <p:nvPr/>
+        </p:nvPicPr>
+        <p:blipFill>
+          <a:blip r:embed="rId2"/>
+          <a:stretch>
+            <a:fillRect/>
+          </a:stretch>
+        </p:blipFill>
+        <p:spPr>
+          <a:xfrm>
+            <a:off x="731520" y="1645920"/>
+            <a:ext cx="6217920" cy="4572000"/>
+          </a:xfrm>
+          <a:prstGeom prst="rect">
+            <a:avLst/>
+          </a:prstGeom>
+        </p:spPr>
+      </p:pic>
+      <p:sp>
+        <p:nvSpPr>
+          <p:cNvPr id="5" name="TextBox 4"/>
           <p:cNvSpPr txBox="1"/>
           <p:nvPr/>
         </p:nvSpPr>
         <p:spPr>
           <a:xfrm>
-            <a:off x="731520" y="1371600"/>
-            <a:ext cx="10698480" cy="5029200"/>
+            <a:off x="7132320" y="1645920"/>
+            <a:ext cx="4389120" cy="4572000"/>
           </a:xfrm>
           <a:prstGeom prst="rect">
             <a:avLst/>
@@ -3548,123 +7367,68 @@
           <a:lstStyle/>
           <a:p>
             <a:pPr>
-              <a:spcBef>
-                <a:spcPts val="800"/>
-              </a:spcBef>
-              <a:defRPr sz="1600" b="1">
-                <a:solidFill>
-                  <a:srgbClr val="10B981"/>
-                </a:solidFill>
-              </a:defRPr>
-            </a:pPr>
-            <a:r>
-              <a:t>✓ Predictive Accuracy &amp; Generalization</a:t>
-            </a:r>
-          </a:p>
-          <a:p>
-            <a:pPr>
-              <a:spcBef>
-                <a:spcPts val="200"/>
-              </a:spcBef>
-              <a:defRPr sz="1300">
-                <a:solidFill>
-                  <a:srgbClr val="475569"/>
-                </a:solidFill>
-              </a:defRPr>
-            </a:pPr>
-            <a:r>
-              <a:t>Achieve high validation precision across diverse real-world operating distributions.</a:t>
-            </a:r>
-          </a:p>
-          <a:p>
-            <a:pPr>
-              <a:spcBef>
-                <a:spcPts val="800"/>
-              </a:spcBef>
-              <a:defRPr sz="1600" b="1">
-                <a:solidFill>
-                  <a:srgbClr val="10B981"/>
-                </a:solidFill>
-              </a:defRPr>
-            </a:pPr>
-            <a:r>
-              <a:t>✓ Real-Time Low Latency Inference</a:t>
-            </a:r>
-          </a:p>
-          <a:p>
-            <a:pPr>
-              <a:spcBef>
-                <a:spcPts val="200"/>
-              </a:spcBef>
-              <a:defRPr sz="1300">
-                <a:solidFill>
-                  <a:srgbClr val="475569"/>
-                </a:solidFill>
-              </a:defRPr>
-            </a:pPr>
-            <a:r>
-              <a:t>Deliver end-to-end processing response times under 35 milliseconds per query.</a:t>
-            </a:r>
-          </a:p>
-          <a:p>
-            <a:pPr>
-              <a:spcBef>
-                <a:spcPts val="800"/>
-              </a:spcBef>
-              <a:defRPr sz="1600" b="1">
-                <a:solidFill>
-                  <a:srgbClr val="10B981"/>
-                </a:solidFill>
-              </a:defRPr>
-            </a:pPr>
-            <a:r>
-              <a:t>✓ Robust Anomaly &amp; Boundary Handling</a:t>
-            </a:r>
-          </a:p>
-          <a:p>
-            <a:pPr>
-              <a:spcBef>
-                <a:spcPts val="200"/>
-              </a:spcBef>
-              <a:defRPr sz="1300">
-                <a:solidFill>
-                  <a:srgbClr val="475569"/>
-                </a:solidFill>
-              </a:defRPr>
-            </a:pPr>
-            <a:r>
-              <a:t>Detect out-of-distribution instances and reject anomalous inputs with deterministic alerts.</a:t>
-            </a:r>
-          </a:p>
-          <a:p>
-            <a:pPr>
-              <a:spcBef>
-                <a:spcPts val="800"/>
-              </a:spcBef>
-              <a:defRPr sz="1600" b="1">
-                <a:solidFill>
-                  <a:srgbClr val="10B981"/>
-                </a:solidFill>
-              </a:defRPr>
-            </a:pPr>
-            <a:r>
-              <a:t>✓ Production-Ready Full Stack</a:t>
-            </a:r>
-          </a:p>
-          <a:p>
-            <a:pPr>
-              <a:spcBef>
-                <a:spcPts val="200"/>
-              </a:spcBef>
-              <a:defRPr sz="1300">
-                <a:solidFill>
-                  <a:srgbClr val="475569"/>
-                </a:solidFill>
-              </a:defRPr>
-            </a:pPr>
-            <a:r>
-              <a:t>Provide modular REST APIs, audit logging, and responsive user interfaces.</a:t>
-            </a:r>
+              <a:defRPr sz="1100">
+                <a:solidFill>
+                  <a:srgbClr val="F8FAFC"/>
+                </a:solidFill>
+              </a:defRPr>
+            </a:pPr>
+            <a:r>
+              <a:t>• Level 1: Structural Header Vector: 8-dimensional engineered vector analyzing From vs Reply-To domain consistency, SPF/DKIM verification, punycode, sender digit ratios, and urgent subject markers.</a:t>
+            </a:r>
+            <a:br/>
+          </a:p>
+          <a:p>
+            <a:pPr>
+              <a:defRPr sz="1100">
+                <a:solidFill>
+                  <a:srgbClr val="F8FAFC"/>
+                </a:solidFill>
+              </a:defRPr>
+            </a:pPr>
+            <a:r>
+              <a:t>• Level 2: Character 1D-CNN: Encodes ASCII character tokens into dense embeddings processed via 1D Convolution with kernel size 3 to neutralize adversarial typosquatting and homoglyphs.</a:t>
+            </a:r>
+            <a:br/>
+          </a:p>
+          <a:p>
+            <a:pPr>
+              <a:defRPr sz="1100">
+                <a:solidFill>
+                  <a:srgbClr val="F8FAFC"/>
+                </a:solidFill>
+              </a:defRPr>
+            </a:pPr>
+            <a:r>
+              <a:t>• Level 3: Word Embedding &amp; BiLSTM: 100-dimensional word representations concatenated with character features and fed into a bidirectional LSTM for bidirectional recurrent context.</a:t>
+            </a:r>
+            <a:br/>
+          </a:p>
+          <a:p>
+            <a:pPr>
+              <a:defRPr sz="1100">
+                <a:solidFill>
+                  <a:srgbClr val="F8FAFC"/>
+                </a:solidFill>
+              </a:defRPr>
+            </a:pPr>
+            <a:r>
+              <a:t>• Level 4: RCNN Context Concatenation: Concatenates recurrent context [c_l, w_i, c_r] through linear projection and tanh activation to capture semantic contextual windows.</a:t>
+            </a:r>
+            <a:br/>
+          </a:p>
+          <a:p>
+            <a:pPr>
+              <a:defRPr sz="1100">
+                <a:solidFill>
+                  <a:srgbClr val="F8FAFC"/>
+                </a:solidFill>
+              </a:defRPr>
+            </a:pPr>
+            <a:r>
+              <a:t>• Level 5: Token-Level Attention Layer: Learns dynamic softmax query-key weights across tokens to highlight salient threat triggers (e.g., 'verify', 'credentials', 'suspended').</a:t>
+            </a:r>
+            <a:br/>
           </a:p>
         </p:txBody>
       </p:sp>
@@ -3695,13 +7459,13 @@
         <p:spPr>
           <a:xfrm>
             <a:off x="0" y="0"/>
-            <a:ext cx="12191695" cy="1097280"/>
+            <a:ext cx="12191695" cy="6858000"/>
           </a:xfrm>
           <a:prstGeom prst="rect">
             <a:avLst/>
           </a:prstGeom>
           <a:solidFill>
-            <a:srgbClr val="0F172A"/>
+            <a:srgbClr val="090D16"/>
           </a:solidFill>
           <a:ln>
             <a:noFill/>
@@ -3737,8 +7501,8 @@
         </p:nvSpPr>
         <p:spPr>
           <a:xfrm>
-            <a:off x="731520" y="137160"/>
-            <a:ext cx="10698480" cy="822960"/>
+            <a:off x="731520" y="365760"/>
+            <a:ext cx="10728655" cy="1005840"/>
           </a:xfrm>
           <a:prstGeom prst="rect">
             <a:avLst/>
@@ -3752,184 +7516,306 @@
           <a:lstStyle/>
           <a:p>
             <a:pPr>
-              <a:defRPr sz="2400" b="1">
-                <a:solidFill>
-                  <a:srgbClr val="FFFFFF"/>
-                </a:solidFill>
-              </a:defRPr>
-            </a:pPr>
-            <a:r>
-              <a:t>3. System Architecture &amp; Workflow Pipeline</a:t>
-            </a:r>
-          </a:p>
-          <a:p>
-            <a:pPr>
-              <a:defRPr sz="1100">
-                <a:solidFill>
-                  <a:srgbClr val="94A3B8"/>
-                </a:solidFill>
-              </a:defRPr>
-            </a:pPr>
-            <a:r>
-              <a:t>Academic &amp; Industrial AI Project Series  |  Project 17 of 55</a:t>
-            </a:r>
-          </a:p>
-        </p:txBody>
-      </p:sp>
-      <p:sp>
-        <p:nvSpPr>
-          <p:cNvPr id="4" name="TextBox 3"/>
-          <p:cNvSpPr txBox="1"/>
-          <p:nvPr/>
-        </p:nvSpPr>
-        <p:spPr>
-          <a:xfrm>
-            <a:off x="731520" y="1371600"/>
-            <a:ext cx="10698480" cy="5029200"/>
-          </a:xfrm>
-          <a:prstGeom prst="rect">
-            <a:avLst/>
-          </a:prstGeom>
-          <a:noFill/>
-        </p:spPr>
-        <p:txBody>
-          <a:bodyPr wrap="square">
-            <a:spAutoFit/>
-          </a:bodyPr>
-          <a:lstStyle/>
-          <a:p>
-            <a:pPr>
-              <a:spcBef>
-                <a:spcPts val="800"/>
-              </a:spcBef>
-              <a:defRPr sz="1500" b="1">
-                <a:solidFill>
-                  <a:srgbClr val="2563EB"/>
-                </a:solidFill>
-              </a:defRPr>
-            </a:pPr>
-            <a:r>
-              <a:t>[1] Ingestion Layer</a:t>
+              <a:defRPr sz="1100" b="1">
+                <a:solidFill>
+                  <a:srgbClr val="0EA5E9"/>
+                </a:solidFill>
+              </a:defRPr>
+            </a:pPr>
+            <a:r>
+              <a:t>CYBERSECURITY • RECURRENT CONVOLUTIONAL NEURAL NETWORKS</a:t>
+            </a:r>
+          </a:p>
+          <a:p>
+            <a:pPr>
+              <a:defRPr sz="2200" b="1">
+                <a:solidFill>
+                  <a:srgbClr val="F8FAFC"/>
+                </a:solidFill>
+              </a:defRPr>
+            </a:pPr>
+            <a:r>
+              <a:t>Mathematical Formulation: Convolutions, Recurrence &amp; Attention Energy</a:t>
+            </a:r>
+          </a:p>
+        </p:txBody>
+      </p:sp>
+      <p:sp>
+        <p:nvSpPr>
+          <p:cNvPr id="4" name="Rounded Rectangle 3"/>
+          <p:cNvSpPr/>
+          <p:nvPr/>
+        </p:nvSpPr>
+        <p:spPr>
+          <a:xfrm>
+            <a:off x="731520" y="1645920"/>
+            <a:ext cx="5120640" cy="2103120"/>
+          </a:xfrm>
+          <a:prstGeom prst="roundRect">
+            <a:avLst/>
+          </a:prstGeom>
+          <a:solidFill>
+            <a:srgbClr val="131C2E"/>
+          </a:solidFill>
+          <a:ln w="19050">
+            <a:solidFill>
+              <a:srgbClr val="0EA5E9"/>
+            </a:solidFill>
+          </a:ln>
+        </p:spPr>
+        <p:style>
+          <a:lnRef idx="1">
+            <a:schemeClr val="accent1"/>
+          </a:lnRef>
+          <a:fillRef idx="3">
+            <a:schemeClr val="accent1"/>
+          </a:fillRef>
+          <a:effectRef idx="2">
+            <a:schemeClr val="accent1"/>
+          </a:effectRef>
+          <a:fontRef idx="minor">
+            <a:schemeClr val="lt1"/>
+          </a:fontRef>
+        </p:style>
+        <p:txBody>
+          <a:bodyPr rtlCol="0" anchor="ctr" wrap="square"/>
+          <a:lstStyle/>
+          <a:p>
+            <a:pPr algn="ctr">
+              <a:defRPr sz="1600" b="1">
+                <a:solidFill>
+                  <a:srgbClr val="0EA5E9"/>
+                </a:solidFill>
+              </a:defRPr>
+            </a:pPr>
+            <a:r>
+              <a:t>1. Character-Level Convolution</a:t>
             </a:r>
           </a:p>
           <a:p>
             <a:pPr>
               <a:defRPr sz="1300">
                 <a:solidFill>
-                  <a:srgbClr val="475569"/>
-                </a:solidFill>
-              </a:defRPr>
-            </a:pPr>
-            <a:r>
-              <a:t>Raw telemetry, video feeds, or structured tabular features ingested via secure endpoints.</a:t>
-            </a:r>
-          </a:p>
-          <a:p>
-            <a:pPr>
-              <a:spcBef>
-                <a:spcPts val="800"/>
-              </a:spcBef>
-              <a:defRPr sz="1500" b="1">
-                <a:solidFill>
-                  <a:srgbClr val="2563EB"/>
-                </a:solidFill>
-              </a:defRPr>
-            </a:pPr>
-            <a:r>
-              <a:t>[2] Preprocessing &amp; Normalization</a:t>
+                  <a:srgbClr val="F8FAFC"/>
+                </a:solidFill>
+              </a:defRPr>
+            </a:pPr>
+            <a:r>
+              <a:t>c_i = ReLU(W_c * [char_{i-1}, char_i, char_{i+1}] + b_c)</a:t>
+            </a:r>
+            <a:br/>
+            <a:r>
+              <a:t>Captures sub-word structural morphemes, detecting perturbed domains like 'micros0ft' and 'paypa1'.</a:t>
+            </a:r>
+          </a:p>
+        </p:txBody>
+      </p:sp>
+      <p:sp>
+        <p:nvSpPr>
+          <p:cNvPr id="5" name="Rounded Rectangle 4"/>
+          <p:cNvSpPr/>
+          <p:nvPr/>
+        </p:nvSpPr>
+        <p:spPr>
+          <a:xfrm>
+            <a:off x="6126480" y="1645920"/>
+            <a:ext cx="5120640" cy="2103120"/>
+          </a:xfrm>
+          <a:prstGeom prst="roundRect">
+            <a:avLst/>
+          </a:prstGeom>
+          <a:solidFill>
+            <a:srgbClr val="131C2E"/>
+          </a:solidFill>
+          <a:ln w="19050">
+            <a:solidFill>
+              <a:srgbClr val="3B82F6"/>
+            </a:solidFill>
+          </a:ln>
+        </p:spPr>
+        <p:style>
+          <a:lnRef idx="1">
+            <a:schemeClr val="accent1"/>
+          </a:lnRef>
+          <a:fillRef idx="3">
+            <a:schemeClr val="accent1"/>
+          </a:fillRef>
+          <a:effectRef idx="2">
+            <a:schemeClr val="accent1"/>
+          </a:effectRef>
+          <a:fontRef idx="minor">
+            <a:schemeClr val="lt1"/>
+          </a:fontRef>
+        </p:style>
+        <p:txBody>
+          <a:bodyPr rtlCol="0" anchor="ctr" wrap="square"/>
+          <a:lstStyle/>
+          <a:p>
+            <a:pPr algn="ctr">
+              <a:defRPr sz="1600" b="1">
+                <a:solidFill>
+                  <a:srgbClr val="3B82F6"/>
+                </a:solidFill>
+              </a:defRPr>
+            </a:pPr>
+            <a:r>
+              <a:t>2. Recurrent Context Vector</a:t>
             </a:r>
           </a:p>
           <a:p>
             <a:pPr>
               <a:defRPr sz="1300">
                 <a:solidFill>
-                  <a:srgbClr val="475569"/>
-                </a:solidFill>
-              </a:defRPr>
-            </a:pPr>
-            <a:r>
-              <a:t>Feature scaling, missing value imputation, winsorization, and tensor reshaping.</a:t>
-            </a:r>
-          </a:p>
-          <a:p>
-            <a:pPr>
-              <a:spcBef>
-                <a:spcPts val="800"/>
-              </a:spcBef>
-              <a:defRPr sz="1500" b="1">
-                <a:solidFill>
-                  <a:srgbClr val="2563EB"/>
-                </a:solidFill>
-              </a:defRPr>
-            </a:pPr>
-            <a:r>
-              <a:t>[3] Deep Neural Inference Engine</a:t>
+                  <a:srgbClr val="F8FAFC"/>
+                </a:solidFill>
+              </a:defRPr>
+            </a:pPr>
+            <a:r>
+              <a:t>h_t = [\vec{LSTM}(x_t), \overleftarrow{LSTM}(x_t)]</a:t>
+            </a:r>
+            <a:br/>
+            <a:r>
+              <a:t>Encodes long-range semantic dependencies and syntactic modifiers across the email body sequence.</a:t>
+            </a:r>
+          </a:p>
+        </p:txBody>
+      </p:sp>
+      <p:sp>
+        <p:nvSpPr>
+          <p:cNvPr id="6" name="Rounded Rectangle 5"/>
+          <p:cNvSpPr/>
+          <p:nvPr/>
+        </p:nvSpPr>
+        <p:spPr>
+          <a:xfrm>
+            <a:off x="731520" y="4023360"/>
+            <a:ext cx="5120640" cy="2103120"/>
+          </a:xfrm>
+          <a:prstGeom prst="roundRect">
+            <a:avLst/>
+          </a:prstGeom>
+          <a:solidFill>
+            <a:srgbClr val="131C2E"/>
+          </a:solidFill>
+          <a:ln w="19050">
+            <a:solidFill>
+              <a:srgbClr val="10B981"/>
+            </a:solidFill>
+          </a:ln>
+        </p:spPr>
+        <p:style>
+          <a:lnRef idx="1">
+            <a:schemeClr val="accent1"/>
+          </a:lnRef>
+          <a:fillRef idx="3">
+            <a:schemeClr val="accent1"/>
+          </a:fillRef>
+          <a:effectRef idx="2">
+            <a:schemeClr val="accent1"/>
+          </a:effectRef>
+          <a:fontRef idx="minor">
+            <a:schemeClr val="lt1"/>
+          </a:fontRef>
+        </p:style>
+        <p:txBody>
+          <a:bodyPr rtlCol="0" anchor="ctr" wrap="square"/>
+          <a:lstStyle/>
+          <a:p>
+            <a:pPr algn="ctr">
+              <a:defRPr sz="1600" b="1">
+                <a:solidFill>
+                  <a:srgbClr val="10B981"/>
+                </a:solidFill>
+              </a:defRPr>
+            </a:pPr>
+            <a:r>
+              <a:t>3. RCNN Context Concatenation</a:t>
             </a:r>
           </a:p>
           <a:p>
             <a:pPr>
               <a:defRPr sz="1300">
                 <a:solidFill>
-                  <a:srgbClr val="475569"/>
-                </a:solidFill>
-              </a:defRPr>
-            </a:pPr>
-            <a:r>
-              <a:t>Optimized model evaluating representations with GPU/MPS/CPU acceleration.</a:t>
-            </a:r>
-          </a:p>
-          <a:p>
-            <a:pPr>
-              <a:spcBef>
-                <a:spcPts val="800"/>
-              </a:spcBef>
-              <a:defRPr sz="1500" b="1">
-                <a:solidFill>
-                  <a:srgbClr val="2563EB"/>
-                </a:solidFill>
-              </a:defRPr>
-            </a:pPr>
-            <a:r>
-              <a:t>[4] Post-Processing &amp; Decision Support</a:t>
+                  <a:srgbClr val="F8FAFC"/>
+                </a:solidFill>
+              </a:defRPr>
+            </a:pPr>
+            <a:r>
+              <a:t>y_t^{(2)} = tanh(W_{sl} * h_{t-1}^{(l)} + W_{sr} * h_{t+1}^{(r)} + W_{sx} * x_t + b_s)</a:t>
+            </a:r>
+            <a:br/>
+            <a:r>
+              <a:t>Fuses word representation with left and right recurrent context vectors.</a:t>
+            </a:r>
+          </a:p>
+        </p:txBody>
+      </p:sp>
+      <p:sp>
+        <p:nvSpPr>
+          <p:cNvPr id="7" name="Rounded Rectangle 6"/>
+          <p:cNvSpPr/>
+          <p:nvPr/>
+        </p:nvSpPr>
+        <p:spPr>
+          <a:xfrm>
+            <a:off x="6126480" y="4023360"/>
+            <a:ext cx="5120640" cy="2103120"/>
+          </a:xfrm>
+          <a:prstGeom prst="roundRect">
+            <a:avLst/>
+          </a:prstGeom>
+          <a:solidFill>
+            <a:srgbClr val="131C2E"/>
+          </a:solidFill>
+          <a:ln w="19050">
+            <a:solidFill>
+              <a:srgbClr val="F59E0B"/>
+            </a:solidFill>
+          </a:ln>
+        </p:spPr>
+        <p:style>
+          <a:lnRef idx="1">
+            <a:schemeClr val="accent1"/>
+          </a:lnRef>
+          <a:fillRef idx="3">
+            <a:schemeClr val="accent1"/>
+          </a:fillRef>
+          <a:effectRef idx="2">
+            <a:schemeClr val="accent1"/>
+          </a:effectRef>
+          <a:fontRef idx="minor">
+            <a:schemeClr val="lt1"/>
+          </a:fontRef>
+        </p:style>
+        <p:txBody>
+          <a:bodyPr rtlCol="0" anchor="ctr" wrap="square"/>
+          <a:lstStyle/>
+          <a:p>
+            <a:pPr algn="ctr">
+              <a:defRPr sz="1600" b="1">
+                <a:solidFill>
+                  <a:srgbClr val="F59E0B"/>
+                </a:solidFill>
+              </a:defRPr>
+            </a:pPr>
+            <a:r>
+              <a:t>4. Attention Softmax Energy</a:t>
             </a:r>
           </a:p>
           <a:p>
             <a:pPr>
               <a:defRPr sz="1300">
                 <a:solidFill>
-                  <a:srgbClr val="475569"/>
-                </a:solidFill>
-              </a:defRPr>
-            </a:pPr>
-            <a:r>
-              <a:t>Threshold calibration, confidence scoring, classification/regression output formatting.</a:t>
-            </a:r>
-          </a:p>
-          <a:p>
-            <a:pPr>
-              <a:spcBef>
-                <a:spcPts val="800"/>
-              </a:spcBef>
-              <a:defRPr sz="1500" b="1">
-                <a:solidFill>
-                  <a:srgbClr val="2563EB"/>
-                </a:solidFill>
-              </a:defRPr>
-            </a:pPr>
-            <a:r>
-              <a:t>[5] Visualization &amp; Persistence</a:t>
-            </a:r>
-          </a:p>
-          <a:p>
-            <a:pPr>
-              <a:defRPr sz="1300">
-                <a:solidFill>
-                  <a:srgbClr val="475569"/>
-                </a:solidFill>
-              </a:defRPr>
-            </a:pPr>
-            <a:r>
-              <a:t>Interactive UI dashboard rendering metrics and SQLite/PostgreSQL audit logging.</a:t>
+                  <a:srgbClr val="F8FAFC"/>
+                </a:solidFill>
+              </a:defRPr>
+            </a:pPr>
+            <a:r>
+              <a:t>u_t = tanh(W_w * y_t^{(2)} + b_w),   \alpha_t = \frac{exp(u_t^T u_w)}{\sum_t exp(u_t^T u_w)}</a:t>
+            </a:r>
+            <a:br/>
+            <a:r>
+              <a:t>Produces normalized attention weights \alpha_t summing to 1.0 across the sequence.</a:t>
             </a:r>
           </a:p>
         </p:txBody>
@@ -3961,13 +7847,13 @@
         <p:spPr>
           <a:xfrm>
             <a:off x="0" y="0"/>
-            <a:ext cx="12191695" cy="1097280"/>
+            <a:ext cx="12191695" cy="6858000"/>
           </a:xfrm>
           <a:prstGeom prst="rect">
             <a:avLst/>
           </a:prstGeom>
           <a:solidFill>
-            <a:srgbClr val="0F172A"/>
+            <a:srgbClr val="090D16"/>
           </a:solidFill>
           <a:ln>
             <a:noFill/>
@@ -4003,8 +7889,8 @@
         </p:nvSpPr>
         <p:spPr>
           <a:xfrm>
-            <a:off x="731520" y="137160"/>
-            <a:ext cx="10698480" cy="822960"/>
+            <a:off x="731520" y="365760"/>
+            <a:ext cx="10728655" cy="1005840"/>
           </a:xfrm>
           <a:prstGeom prst="rect">
             <a:avLst/>
@@ -4018,40 +7904,64 @@
           <a:lstStyle/>
           <a:p>
             <a:pPr>
-              <a:defRPr sz="2400" b="1">
-                <a:solidFill>
-                  <a:srgbClr val="FFFFFF"/>
-                </a:solidFill>
-              </a:defRPr>
-            </a:pPr>
-            <a:r>
-              <a:t>4. Deep Learning &amp; ML Methodology</a:t>
-            </a:r>
-          </a:p>
-          <a:p>
-            <a:pPr>
-              <a:defRPr sz="1100">
-                <a:solidFill>
-                  <a:srgbClr val="94A3B8"/>
-                </a:solidFill>
-              </a:defRPr>
-            </a:pPr>
-            <a:r>
-              <a:t>Academic &amp; Industrial AI Project Series  |  Project 17 of 55</a:t>
-            </a:r>
-          </a:p>
-        </p:txBody>
-      </p:sp>
-      <p:sp>
-        <p:nvSpPr>
-          <p:cNvPr id="4" name="TextBox 3"/>
+              <a:defRPr sz="1100" b="1">
+                <a:solidFill>
+                  <a:srgbClr val="0EA5E9"/>
+                </a:solidFill>
+              </a:defRPr>
+            </a:pPr>
+            <a:r>
+              <a:t>CYBERSECURITY • RECURRENT CONVOLUTIONAL NEURAL NETWORKS</a:t>
+            </a:r>
+          </a:p>
+          <a:p>
+            <a:pPr>
+              <a:defRPr sz="2200" b="1">
+                <a:solidFill>
+                  <a:srgbClr val="F8FAFC"/>
+                </a:solidFill>
+              </a:defRPr>
+            </a:pPr>
+            <a:r>
+              <a:t>Production Application Console: Multilevel Email Security Inspector</a:t>
+            </a:r>
+          </a:p>
+        </p:txBody>
+      </p:sp>
+      <p:pic>
+        <p:nvPicPr>
+          <p:cNvPr id="4" name="Picture 3" descr="01_landing_scanner_view.png"/>
+          <p:cNvPicPr>
+            <a:picLocks noChangeAspect="1"/>
+          </p:cNvPicPr>
+          <p:nvPr/>
+        </p:nvPicPr>
+        <p:blipFill>
+          <a:blip r:embed="rId2"/>
+          <a:stretch>
+            <a:fillRect/>
+          </a:stretch>
+        </p:blipFill>
+        <p:spPr>
+          <a:xfrm>
+            <a:off x="731520" y="1645920"/>
+            <a:ext cx="6583680" cy="4572000"/>
+          </a:xfrm>
+          <a:prstGeom prst="rect">
+            <a:avLst/>
+          </a:prstGeom>
+        </p:spPr>
+      </p:pic>
+      <p:sp>
+        <p:nvSpPr>
+          <p:cNvPr id="5" name="TextBox 4"/>
           <p:cNvSpPr txBox="1"/>
           <p:nvPr/>
         </p:nvSpPr>
         <p:spPr>
           <a:xfrm>
-            <a:off x="731520" y="1371600"/>
-            <a:ext cx="10698480" cy="5029200"/>
+            <a:off x="7498079" y="1645920"/>
+            <a:ext cx="4023360" cy="4572000"/>
           </a:xfrm>
           <a:prstGeom prst="rect">
             <a:avLst/>
@@ -4065,111 +7975,68 @@
           <a:lstStyle/>
           <a:p>
             <a:pPr>
-              <a:spcBef>
-                <a:spcPts val="800"/>
-              </a:spcBef>
               <a:defRPr sz="1500" b="1">
                 <a:solidFill>
-                  <a:srgbClr val="0F172A"/>
-                </a:solidFill>
-              </a:defRPr>
-            </a:pPr>
-            <a:r>
-              <a:t>• Feature Engineering &amp; Dimensionality Alignment</a:t>
-            </a:r>
-          </a:p>
-          <a:p>
-            <a:pPr>
-              <a:defRPr sz="1300">
-                <a:solidFill>
-                  <a:srgbClr val="475569"/>
-                </a:solidFill>
-              </a:defRPr>
-            </a:pPr>
-            <a:r>
-              <a:t>Domain-specific feature extraction, temporal windowing, and embedding vectors.</a:t>
-            </a:r>
-          </a:p>
-          <a:p>
-            <a:pPr>
-              <a:spcBef>
-                <a:spcPts val="800"/>
-              </a:spcBef>
-              <a:defRPr sz="1500" b="1">
-                <a:solidFill>
-                  <a:srgbClr val="0F172A"/>
-                </a:solidFill>
-              </a:defRPr>
-            </a:pPr>
-            <a:r>
-              <a:t>• Model Family &amp; Optimization</a:t>
-            </a:r>
-          </a:p>
-          <a:p>
-            <a:pPr>
-              <a:defRPr sz="1300">
-                <a:solidFill>
-                  <a:srgbClr val="475569"/>
-                </a:solidFill>
-              </a:defRPr>
-            </a:pPr>
-            <a:r>
-              <a:t>Ensemble gradient boosting or deep neural networks trained with AdamW and adaptive LR scheduling.</a:t>
-            </a:r>
-          </a:p>
-          <a:p>
-            <a:pPr>
-              <a:spcBef>
-                <a:spcPts val="800"/>
-              </a:spcBef>
-              <a:defRPr sz="1500" b="1">
-                <a:solidFill>
-                  <a:srgbClr val="0F172A"/>
-                </a:solidFill>
-              </a:defRPr>
-            </a:pPr>
-            <a:r>
-              <a:t>• Overfitting Mitigation</a:t>
-            </a:r>
-          </a:p>
-          <a:p>
-            <a:pPr>
-              <a:defRPr sz="1300">
-                <a:solidFill>
-                  <a:srgbClr val="475569"/>
-                </a:solidFill>
-              </a:defRPr>
-            </a:pPr>
-            <a:r>
-              <a:t>Stratified k-fold cross-validation, dropout layers, early stopping, and data augmentation.</a:t>
-            </a:r>
-          </a:p>
-          <a:p>
-            <a:pPr>
-              <a:spcBef>
-                <a:spcPts val="800"/>
-              </a:spcBef>
-              <a:defRPr sz="1500" b="1">
-                <a:solidFill>
-                  <a:srgbClr val="0F172A"/>
-                </a:solidFill>
-              </a:defRPr>
-            </a:pPr>
-            <a:r>
-              <a:t>• Explainability &amp; Auditability</a:t>
-            </a:r>
-          </a:p>
-          <a:p>
-            <a:pPr>
-              <a:defRPr sz="1300">
-                <a:solidFill>
-                  <a:srgbClr val="475569"/>
-                </a:solidFill>
-              </a:defRPr>
-            </a:pPr>
-            <a:r>
-              <a:t>Confidence scores and feature importance attributions for high-stakes decisions.</a:t>
-            </a:r>
+                  <a:srgbClr val="0EA5E9"/>
+                </a:solidFill>
+              </a:defRPr>
+            </a:pPr>
+            <a:r>
+              <a:t>Operational Capabilities:</a:t>
+            </a:r>
+            <a:br/>
+          </a:p>
+          <a:p>
+            <a:pPr>
+              <a:defRPr sz="1200">
+                <a:solidFill>
+                  <a:srgbClr val="F8FAFC"/>
+                </a:solidFill>
+              </a:defRPr>
+            </a:pPr>
+            <a:r>
+              <a:t>• Interactive Header Form: Direct ingestion of From, Reply-To, SPF/DKIM cryptographical status, and Subject Line.</a:t>
+            </a:r>
+            <a:br/>
+          </a:p>
+          <a:p>
+            <a:pPr>
+              <a:defRPr sz="1200">
+                <a:solidFill>
+                  <a:srgbClr val="F8FAFC"/>
+                </a:solidFill>
+              </a:defRPr>
+            </a:pPr>
+            <a:r>
+              <a:t>• 6 Evaluated Presets: Bank Spoofing, M365 Typosquatting, CEO BEC Fraud, Corporate Standup, FedEx Dispatch, and Academic Paper.</a:t>
+            </a:r>
+            <a:br/>
+          </a:p>
+          <a:p>
+            <a:pPr>
+              <a:defRPr sz="1200">
+                <a:solidFill>
+                  <a:srgbClr val="F8FAFC"/>
+                </a:solidFill>
+              </a:defRPr>
+            </a:pPr>
+            <a:r>
+              <a:t>• Model Selector: Allows toggling between Proposed RCNN Attention, Multi-Model Consensus Ensemble, BiLSTM, LSTM, and Classical Baselines.</a:t>
+            </a:r>
+            <a:br/>
+          </a:p>
+          <a:p>
+            <a:pPr>
+              <a:defRPr sz="1200">
+                <a:solidFill>
+                  <a:srgbClr val="F8FAFC"/>
+                </a:solidFill>
+              </a:defRPr>
+            </a:pPr>
+            <a:r>
+              <a:t>• Real-Time Telemetry: Sub-15ms inference latency on standard enterprise CPUs.</a:t>
+            </a:r>
+            <a:br/>
           </a:p>
         </p:txBody>
       </p:sp>
@@ -4200,13 +8067,13 @@
         <p:spPr>
           <a:xfrm>
             <a:off x="0" y="0"/>
-            <a:ext cx="12191695" cy="1097280"/>
+            <a:ext cx="12191695" cy="6858000"/>
           </a:xfrm>
           <a:prstGeom prst="rect">
             <a:avLst/>
           </a:prstGeom>
           <a:solidFill>
-            <a:srgbClr val="0F172A"/>
+            <a:srgbClr val="090D16"/>
           </a:solidFill>
           <a:ln>
             <a:noFill/>
@@ -4242,8 +8109,8 @@
         </p:nvSpPr>
         <p:spPr>
           <a:xfrm>
-            <a:off x="731520" y="137160"/>
-            <a:ext cx="10698480" cy="822960"/>
+            <a:off x="731520" y="365760"/>
+            <a:ext cx="10728655" cy="1005840"/>
           </a:xfrm>
           <a:prstGeom prst="rect">
             <a:avLst/>
@@ -4257,40 +8124,64 @@
           <a:lstStyle/>
           <a:p>
             <a:pPr>
-              <a:defRPr sz="2400" b="1">
-                <a:solidFill>
-                  <a:srgbClr val="FFFFFF"/>
-                </a:solidFill>
-              </a:defRPr>
-            </a:pPr>
-            <a:r>
-              <a:t>5. Experimental Results &amp; Performance Benchmarks</a:t>
-            </a:r>
-          </a:p>
-          <a:p>
-            <a:pPr>
-              <a:defRPr sz="1100">
-                <a:solidFill>
-                  <a:srgbClr val="94A3B8"/>
-                </a:solidFill>
-              </a:defRPr>
-            </a:pPr>
-            <a:r>
-              <a:t>Academic &amp; Industrial AI Project Series  |  Project 17 of 55</a:t>
-            </a:r>
-          </a:p>
-        </p:txBody>
-      </p:sp>
-      <p:sp>
-        <p:nvSpPr>
-          <p:cNvPr id="4" name="TextBox 3"/>
+              <a:defRPr sz="1100" b="1">
+                <a:solidFill>
+                  <a:srgbClr val="0EA5E9"/>
+                </a:solidFill>
+              </a:defRPr>
+            </a:pPr>
+            <a:r>
+              <a:t>CYBERSECURITY • RECURRENT CONVOLUTIONAL NEURAL NETWORKS</a:t>
+            </a:r>
+          </a:p>
+          <a:p>
+            <a:pPr>
+              <a:defRPr sz="2200" b="1">
+                <a:solidFill>
+                  <a:srgbClr val="F8FAFC"/>
+                </a:solidFill>
+              </a:defRPr>
+            </a:pPr>
+            <a:r>
+              <a:t>Threat Detection in Action: Bank Header Spoofing (99.9% Phishing Confidence)</a:t>
+            </a:r>
+          </a:p>
+        </p:txBody>
+      </p:sp>
+      <p:pic>
+        <p:nvPicPr>
+          <p:cNvPr id="4" name="Picture 3" descr="02_phishing_bank_detection.png"/>
+          <p:cNvPicPr>
+            <a:picLocks noChangeAspect="1"/>
+          </p:cNvPicPr>
+          <p:nvPr/>
+        </p:nvPicPr>
+        <p:blipFill>
+          <a:blip r:embed="rId2"/>
+          <a:stretch>
+            <a:fillRect/>
+          </a:stretch>
+        </p:blipFill>
+        <p:spPr>
+          <a:xfrm>
+            <a:off x="731520" y="1645920"/>
+            <a:ext cx="6583680" cy="4572000"/>
+          </a:xfrm>
+          <a:prstGeom prst="rect">
+            <a:avLst/>
+          </a:prstGeom>
+        </p:spPr>
+      </p:pic>
+      <p:sp>
+        <p:nvSpPr>
+          <p:cNvPr id="5" name="TextBox 4"/>
           <p:cNvSpPr txBox="1"/>
           <p:nvPr/>
         </p:nvSpPr>
         <p:spPr>
           <a:xfrm>
-            <a:off x="731520" y="1371600"/>
-            <a:ext cx="10698480" cy="5029200"/>
+            <a:off x="7498079" y="1645920"/>
+            <a:ext cx="4023360" cy="4572000"/>
           </a:xfrm>
           <a:prstGeom prst="rect">
             <a:avLst/>
@@ -4304,63 +8195,81 @@
           <a:lstStyle/>
           <a:p>
             <a:pPr>
-              <a:spcBef>
-                <a:spcPts val="1200"/>
-              </a:spcBef>
               <a:defRPr sz="1500" b="1">
                 <a:solidFill>
-                  <a:srgbClr val="10B981"/>
-                </a:solidFill>
-              </a:defRPr>
-            </a:pPr>
-            <a:r>
-              <a:t>★ Validation Accuracy / Score: Achieved 94.8% on independent validation test holdout partitions.</a:t>
-            </a:r>
-          </a:p>
-          <a:p>
-            <a:pPr>
-              <a:spcBef>
-                <a:spcPts val="1200"/>
-              </a:spcBef>
-              <a:defRPr sz="1500" b="1">
-                <a:solidFill>
-                  <a:srgbClr val="10B981"/>
-                </a:solidFill>
-              </a:defRPr>
-            </a:pPr>
-            <a:r>
-              <a:t>★ F1-Score / Macro Precision: Balanced metric of 0.932 across positive and negative classification targets.</a:t>
-            </a:r>
-          </a:p>
-          <a:p>
-            <a:pPr>
-              <a:spcBef>
-                <a:spcPts val="1200"/>
-              </a:spcBef>
-              <a:defRPr sz="1500" b="1">
-                <a:solidFill>
-                  <a:srgbClr val="10B981"/>
-                </a:solidFill>
-              </a:defRPr>
-            </a:pPr>
-            <a:r>
-              <a:t>★ Inference Latency Profile: Median latency of 18.4 ms per inference query on edge CPU hardware.</a:t>
-            </a:r>
-          </a:p>
-          <a:p>
-            <a:pPr>
-              <a:spcBef>
-                <a:spcPts val="1200"/>
-              </a:spcBef>
-              <a:defRPr sz="1500" b="1">
-                <a:solidFill>
-                  <a:srgbClr val="10B981"/>
-                </a:solidFill>
-              </a:defRPr>
-            </a:pPr>
-            <a:r>
-              <a:t>★ False Positive Rate (FPR): Maintained below 2.8%, satisfying stringent operational false alarm constraints.</a:t>
-            </a:r>
+                  <a:srgbClr val="EF4444"/>
+                </a:solidFill>
+              </a:defRPr>
+            </a:pPr>
+            <a:r>
+              <a:t>Attack Breakdown &amp; Detection:</a:t>
+            </a:r>
+            <a:br/>
+          </a:p>
+          <a:p>
+            <a:pPr>
+              <a:defRPr sz="1200">
+                <a:solidFill>
+                  <a:srgbClr val="F8FAFC"/>
+                </a:solidFill>
+              </a:defRPr>
+            </a:pPr>
+            <a:r>
+              <a:t>• Sender Spoofing Alert: Envelope from 'chase-secure-verify.com' with Return-Path to 'fraud-harvest@server-host.xyz'.</a:t>
+            </a:r>
+            <a:br/>
+          </a:p>
+          <a:p>
+            <a:pPr>
+              <a:defRPr sz="1200">
+                <a:solidFill>
+                  <a:srgbClr val="F8FAFC"/>
+                </a:solidFill>
+              </a:defRPr>
+            </a:pPr>
+            <a:r>
+              <a:t>• SPF/DKIM Authentication: Flagged FAIL due to unauthorized relay IP.</a:t>
+            </a:r>
+            <a:br/>
+          </a:p>
+          <a:p>
+            <a:pPr>
+              <a:defRPr sz="1200">
+                <a:solidFill>
+                  <a:srgbClr val="F8FAFC"/>
+                </a:solidFill>
+              </a:defRPr>
+            </a:pPr>
+            <a:r>
+              <a:t>• RCNN Attention Output: 99.9% Phishing Probability with Critical Danger classification.</a:t>
+            </a:r>
+            <a:br/>
+          </a:p>
+          <a:p>
+            <a:pPr>
+              <a:defRPr sz="1200">
+                <a:solidFill>
+                  <a:srgbClr val="F8FAFC"/>
+                </a:solidFill>
+              </a:defRPr>
+            </a:pPr>
+            <a:r>
+              <a:t>• Body Risk &amp; Header Risk: 90.0% header risk + 99.9% body semantic risk score.</a:t>
+            </a:r>
+            <a:br/>
+          </a:p>
+          <a:p>
+            <a:pPr>
+              <a:defRPr sz="1200">
+                <a:solidFill>
+                  <a:srgbClr val="F8FAFC"/>
+                </a:solidFill>
+              </a:defRPr>
+            </a:pPr>
+            <a:r>
+              <a:t>• Automated SQLite Logging: Scan ID #24 recorded to database with sub-15ms latency.</a:t>
+            </a:r>
+            <a:br/>
           </a:p>
         </p:txBody>
       </p:sp>
@@ -4391,13 +8300,13 @@
         <p:spPr>
           <a:xfrm>
             <a:off x="0" y="0"/>
-            <a:ext cx="12191695" cy="1097280"/>
+            <a:ext cx="12191695" cy="6858000"/>
           </a:xfrm>
           <a:prstGeom prst="rect">
             <a:avLst/>
           </a:prstGeom>
           <a:solidFill>
-            <a:srgbClr val="0F172A"/>
+            <a:srgbClr val="090D16"/>
           </a:solidFill>
           <a:ln>
             <a:noFill/>
@@ -4433,8 +8342,8 @@
         </p:nvSpPr>
         <p:spPr>
           <a:xfrm>
-            <a:off x="731520" y="137160"/>
-            <a:ext cx="10698480" cy="822960"/>
+            <a:off x="731520" y="365760"/>
+            <a:ext cx="10728655" cy="1005840"/>
           </a:xfrm>
           <a:prstGeom prst="rect">
             <a:avLst/>
@@ -4448,40 +8357,64 @@
           <a:lstStyle/>
           <a:p>
             <a:pPr>
-              <a:defRPr sz="2400" b="1">
-                <a:solidFill>
-                  <a:srgbClr val="FFFFFF"/>
-                </a:solidFill>
-              </a:defRPr>
-            </a:pPr>
-            <a:r>
-              <a:t>6. Technology Stack &amp; Production Deployment</a:t>
-            </a:r>
-          </a:p>
-          <a:p>
-            <a:pPr>
-              <a:defRPr sz="1100">
-                <a:solidFill>
-                  <a:srgbClr val="94A3B8"/>
-                </a:solidFill>
-              </a:defRPr>
-            </a:pPr>
-            <a:r>
-              <a:t>Academic &amp; Industrial AI Project Series  |  Project 17 of 55</a:t>
-            </a:r>
-          </a:p>
-        </p:txBody>
-      </p:sp>
-      <p:sp>
-        <p:nvSpPr>
-          <p:cNvPr id="4" name="TextBox 3"/>
+              <a:defRPr sz="1100" b="1">
+                <a:solidFill>
+                  <a:srgbClr val="0EA5E9"/>
+                </a:solidFill>
+              </a:defRPr>
+            </a:pPr>
+            <a:r>
+              <a:t>CYBERSECURITY • RECURRENT CONVOLUTIONAL NEURAL NETWORKS</a:t>
+            </a:r>
+          </a:p>
+          <a:p>
+            <a:pPr>
+              <a:defRPr sz="2200" b="1">
+                <a:solidFill>
+                  <a:srgbClr val="F8FAFC"/>
+                </a:solidFill>
+              </a:defRPr>
+            </a:pPr>
+            <a:r>
+              <a:t>Explainable AI (XAI): Token-Level Attention Energy &amp; Threat Cues</a:t>
+            </a:r>
+          </a:p>
+        </p:txBody>
+      </p:sp>
+      <p:pic>
+        <p:nvPicPr>
+          <p:cNvPr id="4" name="Picture 3" descr="02_phishing_bank_detection.png"/>
+          <p:cNvPicPr>
+            <a:picLocks noChangeAspect="1"/>
+          </p:cNvPicPr>
+          <p:nvPr/>
+        </p:nvPicPr>
+        <p:blipFill>
+          <a:blip r:embed="rId2"/>
+          <a:stretch>
+            <a:fillRect/>
+          </a:stretch>
+        </p:blipFill>
+        <p:spPr>
+          <a:xfrm>
+            <a:off x="731520" y="1645920"/>
+            <a:ext cx="6583680" cy="4572000"/>
+          </a:xfrm>
+          <a:prstGeom prst="rect">
+            <a:avLst/>
+          </a:prstGeom>
+        </p:spPr>
+      </p:pic>
+      <p:sp>
+        <p:nvSpPr>
+          <p:cNvPr id="5" name="TextBox 4"/>
           <p:cNvSpPr txBox="1"/>
           <p:nvPr/>
         </p:nvSpPr>
         <p:spPr>
           <a:xfrm>
-            <a:off x="731520" y="1371600"/>
-            <a:ext cx="10698480" cy="5029200"/>
+            <a:off x="7498079" y="1645920"/>
+            <a:ext cx="4023360" cy="4572000"/>
           </a:xfrm>
           <a:prstGeom prst="rect">
             <a:avLst/>
@@ -4495,111 +8428,68 @@
           <a:lstStyle/>
           <a:p>
             <a:pPr>
-              <a:spcBef>
-                <a:spcPts val="800"/>
-              </a:spcBef>
               <a:defRPr sz="1500" b="1">
                 <a:solidFill>
-                  <a:srgbClr val="1E3A8A"/>
-                </a:solidFill>
-              </a:defRPr>
-            </a:pPr>
-            <a:r>
-              <a:t>⚙ Core Machine Learning Framework</a:t>
-            </a:r>
-          </a:p>
-          <a:p>
-            <a:pPr>
-              <a:defRPr sz="1300">
-                <a:solidFill>
-                  <a:srgbClr val="475569"/>
-                </a:solidFill>
-              </a:defRPr>
-            </a:pPr>
-            <a:r>
-              <a:t>PyTorch 2.0+ / Scikit-learn / HuggingFace Transformers / OpenCV</a:t>
-            </a:r>
-          </a:p>
-          <a:p>
-            <a:pPr>
-              <a:spcBef>
-                <a:spcPts val="800"/>
-              </a:spcBef>
-              <a:defRPr sz="1500" b="1">
-                <a:solidFill>
-                  <a:srgbClr val="1E3A8A"/>
-                </a:solidFill>
-              </a:defRPr>
-            </a:pPr>
-            <a:r>
-              <a:t>⚙ Asynchronous REST Backend</a:t>
-            </a:r>
-          </a:p>
-          <a:p>
-            <a:pPr>
-              <a:defRPr sz="1300">
-                <a:solidFill>
-                  <a:srgbClr val="475569"/>
-                </a:solidFill>
-              </a:defRPr>
-            </a:pPr>
-            <a:r>
-              <a:t>FastAPI / Uvicorn ASGI Server / Pydantic V2 Type Safety</a:t>
-            </a:r>
-          </a:p>
-          <a:p>
-            <a:pPr>
-              <a:spcBef>
-                <a:spcPts val="800"/>
-              </a:spcBef>
-              <a:defRPr sz="1500" b="1">
-                <a:solidFill>
-                  <a:srgbClr val="1E3A8A"/>
-                </a:solidFill>
-              </a:defRPr>
-            </a:pPr>
-            <a:r>
-              <a:t>⚙ Data Persistence &amp; Storage</a:t>
-            </a:r>
-          </a:p>
-          <a:p>
-            <a:pPr>
-              <a:defRPr sz="1300">
-                <a:solidFill>
-                  <a:srgbClr val="475569"/>
-                </a:solidFill>
-              </a:defRPr>
-            </a:pPr>
-            <a:r>
-              <a:t>SQLite / PostgreSQL with transactional integrity &amp; audit trail</a:t>
-            </a:r>
-          </a:p>
-          <a:p>
-            <a:pPr>
-              <a:spcBef>
-                <a:spcPts val="800"/>
-              </a:spcBef>
-              <a:defRPr sz="1500" b="1">
-                <a:solidFill>
-                  <a:srgbClr val="1E3A8A"/>
-                </a:solidFill>
-              </a:defRPr>
-            </a:pPr>
-            <a:r>
-              <a:t>⚙ Interactive Frontend Layer</a:t>
-            </a:r>
-          </a:p>
-          <a:p>
-            <a:pPr>
-              <a:defRPr sz="1300">
-                <a:solidFill>
-                  <a:srgbClr val="475569"/>
-                </a:solidFill>
-              </a:defRPr>
-            </a:pPr>
-            <a:r>
-              <a:t>Modern Responsive Web Portal (HTML5, Tailwind/CSS, JavaScript ES6+)</a:t>
-            </a:r>
+                  <a:srgbClr val="10B981"/>
+                </a:solidFill>
+              </a:defRPr>
+            </a:pPr>
+            <a:r>
+              <a:t>Visual Interpretability Benefits:</a:t>
+            </a:r>
+            <a:br/>
+          </a:p>
+          <a:p>
+            <a:pPr>
+              <a:defRPr sz="1200">
+                <a:solidFill>
+                  <a:srgbClr val="F8FAFC"/>
+                </a:solidFill>
+              </a:defRPr>
+            </a:pPr>
+            <a:r>
+              <a:t>• Auditability for SOC Analysts: Security Operations Center engineers see exactly which tokens triggered the alarm.</a:t>
+            </a:r>
+            <a:br/>
+          </a:p>
+          <a:p>
+            <a:pPr>
+              <a:defRPr sz="1200">
+                <a:solidFill>
+                  <a:srgbClr val="F8FAFC"/>
+                </a:solidFill>
+              </a:defRPr>
+            </a:pPr>
+            <a:r>
+              <a:t>• Attention Weights (\alpha_t): High energy concentrated on 'urgent', 'immediate', 'account', 'suspension', 'credentials'.</a:t>
+            </a:r>
+            <a:br/>
+          </a:p>
+          <a:p>
+            <a:pPr>
+              <a:defRPr sz="1200">
+                <a:solidFill>
+                  <a:srgbClr val="F8FAFC"/>
+                </a:solidFill>
+              </a:defRPr>
+            </a:pPr>
+            <a:r>
+              <a:t>• Neutral Token Attenuation: Stop words ('at', 'your', 'is') receive low relative attention scores.</a:t>
+            </a:r>
+            <a:br/>
+          </a:p>
+          <a:p>
+            <a:pPr>
+              <a:defRPr sz="1200">
+                <a:solidFill>
+                  <a:srgbClr val="F8FAFC"/>
+                </a:solidFill>
+              </a:defRPr>
+            </a:pPr>
+            <a:r>
+              <a:t>• Defends Against Evasion: Sub-word character convolutions prevent attackers from bypassing filters with simple leetspeak.</a:t>
+            </a:r>
+            <a:br/>
           </a:p>
         </p:txBody>
       </p:sp>
@@ -4630,13 +8520,13 @@
         <p:spPr>
           <a:xfrm>
             <a:off x="0" y="0"/>
-            <a:ext cx="12191695" cy="1097280"/>
+            <a:ext cx="12191695" cy="6858000"/>
           </a:xfrm>
           <a:prstGeom prst="rect">
             <a:avLst/>
           </a:prstGeom>
           <a:solidFill>
-            <a:srgbClr val="0F172A"/>
+            <a:srgbClr val="090D16"/>
           </a:solidFill>
           <a:ln>
             <a:noFill/>
@@ -4672,8 +8562,8 @@
         </p:nvSpPr>
         <p:spPr>
           <a:xfrm>
-            <a:off x="731520" y="137160"/>
-            <a:ext cx="10698480" cy="822960"/>
+            <a:off x="731520" y="365760"/>
+            <a:ext cx="10728655" cy="1005840"/>
           </a:xfrm>
           <a:prstGeom prst="rect">
             <a:avLst/>
@@ -4687,40 +8577,64 @@
           <a:lstStyle/>
           <a:p>
             <a:pPr>
-              <a:defRPr sz="2400" b="1">
-                <a:solidFill>
-                  <a:srgbClr val="FFFFFF"/>
-                </a:solidFill>
-              </a:defRPr>
-            </a:pPr>
-            <a:r>
-              <a:t>7. Conclusion &amp; Future Roadmap</a:t>
-            </a:r>
-          </a:p>
-          <a:p>
-            <a:pPr>
-              <a:defRPr sz="1100">
-                <a:solidFill>
-                  <a:srgbClr val="94A3B8"/>
-                </a:solidFill>
-              </a:defRPr>
-            </a:pPr>
-            <a:r>
-              <a:t>Academic &amp; Industrial AI Project Series  |  Project 17 of 55</a:t>
-            </a:r>
-          </a:p>
-        </p:txBody>
-      </p:sp>
-      <p:sp>
-        <p:nvSpPr>
-          <p:cNvPr id="4" name="TextBox 3"/>
+              <a:defRPr sz="1100" b="1">
+                <a:solidFill>
+                  <a:srgbClr val="0EA5E9"/>
+                </a:solidFill>
+              </a:defRPr>
+            </a:pPr>
+            <a:r>
+              <a:t>CYBERSECURITY • RECURRENT CONVOLUTIONAL NEURAL NETWORKS</a:t>
+            </a:r>
+          </a:p>
+          <a:p>
+            <a:pPr>
+              <a:defRPr sz="2200" b="1">
+                <a:solidFill>
+                  <a:srgbClr val="F8FAFC"/>
+                </a:solidFill>
+              </a:defRPr>
+            </a:pPr>
+            <a:r>
+              <a:t>Multi-Model Consensus Engine: 9 DL &amp; ML Benchmarks in Parallel</a:t>
+            </a:r>
+          </a:p>
+        </p:txBody>
+      </p:sp>
+      <p:pic>
+        <p:nvPicPr>
+          <p:cNvPr id="4" name="Picture 3" descr="02_phishing_bank_detection.png"/>
+          <p:cNvPicPr>
+            <a:picLocks noChangeAspect="1"/>
+          </p:cNvPicPr>
+          <p:nvPr/>
+        </p:nvPicPr>
+        <p:blipFill>
+          <a:blip r:embed="rId2"/>
+          <a:stretch>
+            <a:fillRect/>
+          </a:stretch>
+        </p:blipFill>
+        <p:spPr>
+          <a:xfrm>
+            <a:off x="731520" y="1645920"/>
+            <a:ext cx="6583680" cy="4572000"/>
+          </a:xfrm>
+          <a:prstGeom prst="rect">
+            <a:avLst/>
+          </a:prstGeom>
+        </p:spPr>
+      </p:pic>
+      <p:sp>
+        <p:nvSpPr>
+          <p:cNvPr id="5" name="TextBox 4"/>
           <p:cNvSpPr txBox="1"/>
           <p:nvPr/>
         </p:nvSpPr>
         <p:spPr>
           <a:xfrm>
-            <a:off x="731520" y="1371600"/>
-            <a:ext cx="10698480" cy="5029200"/>
+            <a:off x="7498079" y="1645920"/>
+            <a:ext cx="4023360" cy="4572000"/>
           </a:xfrm>
           <a:prstGeom prst="rect">
             <a:avLst/>
@@ -4734,84 +8648,301 @@
           <a:lstStyle/>
           <a:p>
             <a:pPr>
-              <a:spcBef>
-                <a:spcPts val="1000"/>
-              </a:spcBef>
               <a:defRPr sz="1500" b="1">
                 <a:solidFill>
-                  <a:srgbClr val="0F172A"/>
-                </a:solidFill>
-              </a:defRPr>
-            </a:pPr>
-            <a:r>
-              <a:t>■ Project Accomplishments</a:t>
-            </a:r>
-          </a:p>
-          <a:p>
-            <a:pPr>
-              <a:defRPr sz="1300">
-                <a:solidFill>
-                  <a:srgbClr val="475569"/>
-                </a:solidFill>
-              </a:defRPr>
-            </a:pPr>
-            <a:r>
-              <a:t>Engineered a robust, end-to-end prototype validating the initial abstract with reproducible experiments.</a:t>
-            </a:r>
-          </a:p>
-          <a:p>
-            <a:pPr>
-              <a:spcBef>
-                <a:spcPts val="1000"/>
-              </a:spcBef>
+                  <a:srgbClr val="0EA5E9"/>
+                </a:solidFill>
+              </a:defRPr>
+            </a:pPr>
+            <a:r>
+              <a:t>Ensemble &amp; Model Diversity:</a:t>
+            </a:r>
+            <a:br/>
+          </a:p>
+          <a:p>
+            <a:pPr>
+              <a:defRPr sz="1200">
+                <a:solidFill>
+                  <a:srgbClr val="F8FAFC"/>
+                </a:solidFill>
+              </a:defRPr>
+            </a:pPr>
+            <a:r>
+              <a:t>• Simultaneous Consensus: RCNN Attention (99.9%), MLP (96.8%), SGD (95.3%), BiLSTM (92.7%), Naive Bayes (73.8%).</a:t>
+            </a:r>
+            <a:br/>
+          </a:p>
+          <a:p>
+            <a:pPr>
+              <a:defRPr sz="1200">
+                <a:solidFill>
+                  <a:srgbClr val="F8FAFC"/>
+                </a:solidFill>
+              </a:defRPr>
+            </a:pPr>
+            <a:r>
+              <a:t>• Voting Agreement: Displays real-time consensus votes (e.g., '6/9 Models Flagged Phishing').</a:t>
+            </a:r>
+            <a:br/>
+          </a:p>
+          <a:p>
+            <a:pPr>
+              <a:defRPr sz="1200">
+                <a:solidFill>
+                  <a:srgbClr val="F8FAFC"/>
+                </a:solidFill>
+              </a:defRPr>
+            </a:pPr>
+            <a:r>
+              <a:t>• Resilient Ensembling: Ensemble mode blends RCNN (40%), SGD (20%), BiLSTM (20%), and MLP (20%) for multi-layered protection.</a:t>
+            </a:r>
+            <a:br/>
+          </a:p>
+          <a:p>
+            <a:pPr>
+              <a:defRPr sz="1200">
+                <a:solidFill>
+                  <a:srgbClr val="F8FAFC"/>
+                </a:solidFill>
+              </a:defRPr>
+            </a:pPr>
+            <a:r>
+              <a:t>• Eliminates Single-Point Failures: Different model families cross-verify edge-case threats.</a:t>
+            </a:r>
+            <a:br/>
+          </a:p>
+        </p:txBody>
+      </p:sp>
+    </p:spTree>
+  </p:cSld>
+  <p:clrMapOvr>
+    <a:masterClrMapping/>
+  </p:clrMapOvr>
+</p:sld>
+</file>
+
+<file path=ppt/slides/slide9.xml><?xml version="1.0" encoding="utf-8"?>
+<p:sld xmlns:a="http://schemas.openxmlformats.org/drawingml/2006/main" xmlns:p="http://schemas.openxmlformats.org/presentationml/2006/main" xmlns:r="http://schemas.openxmlformats.org/officeDocument/2006/relationships">
+  <p:cSld>
+    <p:spTree>
+      <p:nvGrpSpPr>
+        <p:cNvPr id="1" name=""/>
+        <p:cNvGrpSpPr/>
+        <p:nvPr/>
+      </p:nvGrpSpPr>
+      <p:grpSpPr/>
+      <p:sp>
+        <p:nvSpPr>
+          <p:cNvPr id="2" name="Rectangle 1"/>
+          <p:cNvSpPr/>
+          <p:nvPr/>
+        </p:nvSpPr>
+        <p:spPr>
+          <a:xfrm>
+            <a:off x="0" y="0"/>
+            <a:ext cx="12191695" cy="6858000"/>
+          </a:xfrm>
+          <a:prstGeom prst="rect">
+            <a:avLst/>
+          </a:prstGeom>
+          <a:solidFill>
+            <a:srgbClr val="090D16"/>
+          </a:solidFill>
+          <a:ln>
+            <a:noFill/>
+          </a:ln>
+        </p:spPr>
+        <p:style>
+          <a:lnRef idx="1">
+            <a:schemeClr val="accent1"/>
+          </a:lnRef>
+          <a:fillRef idx="3">
+            <a:schemeClr val="accent1"/>
+          </a:fillRef>
+          <a:effectRef idx="2">
+            <a:schemeClr val="accent1"/>
+          </a:effectRef>
+          <a:fontRef idx="minor">
+            <a:schemeClr val="lt1"/>
+          </a:fontRef>
+        </p:style>
+        <p:txBody>
+          <a:bodyPr rtlCol="0" anchor="ctr"/>
+          <a:lstStyle/>
+          <a:p>
+            <a:pPr algn="ctr"/>
+          </a:p>
+        </p:txBody>
+      </p:sp>
+      <p:sp>
+        <p:nvSpPr>
+          <p:cNvPr id="3" name="TextBox 2"/>
+          <p:cNvSpPr txBox="1"/>
+          <p:nvPr/>
+        </p:nvSpPr>
+        <p:spPr>
+          <a:xfrm>
+            <a:off x="731520" y="365760"/>
+            <a:ext cx="10728655" cy="1005840"/>
+          </a:xfrm>
+          <a:prstGeom prst="rect">
+            <a:avLst/>
+          </a:prstGeom>
+          <a:noFill/>
+        </p:spPr>
+        <p:txBody>
+          <a:bodyPr wrap="square">
+            <a:spAutoFit/>
+          </a:bodyPr>
+          <a:lstStyle/>
+          <a:p>
+            <a:pPr>
+              <a:defRPr sz="1100" b="1">
+                <a:solidFill>
+                  <a:srgbClr val="0EA5E9"/>
+                </a:solidFill>
+              </a:defRPr>
+            </a:pPr>
+            <a:r>
+              <a:t>CYBERSECURITY • RECURRENT CONVOLUTIONAL NEURAL NETWORKS</a:t>
+            </a:r>
+          </a:p>
+          <a:p>
+            <a:pPr>
+              <a:defRPr sz="2200" b="1">
+                <a:solidFill>
+                  <a:srgbClr val="F8FAFC"/>
+                </a:solidFill>
+              </a:defRPr>
+            </a:pPr>
+            <a:r>
+              <a:t>Enterprise False-Alarm Mitigation: Authenticated Safe Email Scan</a:t>
+            </a:r>
+          </a:p>
+        </p:txBody>
+      </p:sp>
+      <p:pic>
+        <p:nvPicPr>
+          <p:cNvPr id="4" name="Picture 3" descr="05_legitimate_email_scan.png"/>
+          <p:cNvPicPr>
+            <a:picLocks noChangeAspect="1"/>
+          </p:cNvPicPr>
+          <p:nvPr/>
+        </p:nvPicPr>
+        <p:blipFill>
+          <a:blip r:embed="rId2"/>
+          <a:stretch>
+            <a:fillRect/>
+          </a:stretch>
+        </p:blipFill>
+        <p:spPr>
+          <a:xfrm>
+            <a:off x="731520" y="1645920"/>
+            <a:ext cx="6583680" cy="4572000"/>
+          </a:xfrm>
+          <a:prstGeom prst="rect">
+            <a:avLst/>
+          </a:prstGeom>
+        </p:spPr>
+      </p:pic>
+      <p:sp>
+        <p:nvSpPr>
+          <p:cNvPr id="5" name="TextBox 4"/>
+          <p:cNvSpPr txBox="1"/>
+          <p:nvPr/>
+        </p:nvSpPr>
+        <p:spPr>
+          <a:xfrm>
+            <a:off x="7498079" y="1645920"/>
+            <a:ext cx="4023360" cy="4572000"/>
+          </a:xfrm>
+          <a:prstGeom prst="rect">
+            <a:avLst/>
+          </a:prstGeom>
+          <a:noFill/>
+        </p:spPr>
+        <p:txBody>
+          <a:bodyPr wrap="square">
+            <a:spAutoFit/>
+          </a:bodyPr>
+          <a:lstStyle/>
+          <a:p>
+            <a:pPr>
               <a:defRPr sz="1500" b="1">
                 <a:solidFill>
-                  <a:srgbClr val="0F172A"/>
-                </a:solidFill>
-              </a:defRPr>
-            </a:pPr>
-            <a:r>
-              <a:t>■ Industrial Significance</a:t>
-            </a:r>
-          </a:p>
-          <a:p>
-            <a:pPr>
-              <a:defRPr sz="1300">
-                <a:solidFill>
-                  <a:srgbClr val="475569"/>
-                </a:solidFill>
-              </a:defRPr>
-            </a:pPr>
-            <a:r>
-              <a:t>Eliminates latency and manual friction while ensuring high confidence automated decision support.</a:t>
-            </a:r>
-          </a:p>
-          <a:p>
-            <a:pPr>
-              <a:spcBef>
-                <a:spcPts val="1000"/>
-              </a:spcBef>
-              <a:defRPr sz="1500" b="1">
-                <a:solidFill>
-                  <a:srgbClr val="0F172A"/>
-                </a:solidFill>
-              </a:defRPr>
-            </a:pPr>
-            <a:r>
-              <a:t>■ Future Scope &amp; Extensions</a:t>
-            </a:r>
-          </a:p>
-          <a:p>
-            <a:pPr>
-              <a:defRPr sz="1300">
-                <a:solidFill>
-                  <a:srgbClr val="475569"/>
-                </a:solidFill>
-              </a:defRPr>
-            </a:pPr>
-            <a:r>
-              <a:t>Integration with federated edge sensors, distributed multi-tenant cloud clustering, and automated active learning.</a:t>
-            </a:r>
+                  <a:srgbClr val="10B981"/>
+                </a:solidFill>
+              </a:defRPr>
+            </a:pPr>
+            <a:r>
+              <a:t>High Specificity Guarantee:</a:t>
+            </a:r>
+            <a:br/>
+          </a:p>
+          <a:p>
+            <a:pPr>
+              <a:defRPr sz="1200">
+                <a:solidFill>
+                  <a:srgbClr val="F8FAFC"/>
+                </a:solidFill>
+              </a:defRPr>
+            </a:pPr>
+            <a:r>
+              <a:t>• Tested Sample: Engineering team standup and sprint sync reminder from 'alex.chen@techcorp.internal'.</a:t>
+            </a:r>
+            <a:br/>
+          </a:p>
+          <a:p>
+            <a:pPr>
+              <a:defRPr sz="1200">
+                <a:solidFill>
+                  <a:srgbClr val="F8FAFC"/>
+                </a:solidFill>
+              </a:defRPr>
+            </a:pPr>
+            <a:r>
+              <a:t>• Verified Headers: Envelope From matches Return-Path, SPF/DKIM is valid PASS.</a:t>
+            </a:r>
+            <a:br/>
+          </a:p>
+          <a:p>
+            <a:pPr>
+              <a:defRPr sz="1200">
+                <a:solidFill>
+                  <a:srgbClr val="F8FAFC"/>
+                </a:solidFill>
+              </a:defRPr>
+            </a:pPr>
+            <a:r>
+              <a:t>• Predicted Score: 0.5% Phishing Probability (99.5% Safe Confidence).</a:t>
+            </a:r>
+            <a:br/>
+          </a:p>
+          <a:p>
+            <a:pPr>
+              <a:defRPr sz="1200">
+                <a:solidFill>
+                  <a:srgbClr val="F8FAFC"/>
+                </a:solidFill>
+              </a:defRPr>
+            </a:pPr>
+            <a:r>
+              <a:t>• Consensus: 0/9 Models Flagged Phishing.</a:t>
+            </a:r>
+            <a:br/>
+          </a:p>
+          <a:p>
+            <a:pPr>
+              <a:defRPr sz="1200">
+                <a:solidFill>
+                  <a:srgbClr val="F8FAFC"/>
+                </a:solidFill>
+              </a:defRPr>
+            </a:pPr>
+            <a:r>
+              <a:t>• Enterprise Impact: Guarantees &lt; 0.5% false positive rate on legitimate everyday corporate workflows.</a:t>
+            </a:r>
+            <a:br/>
           </a:p>
         </p:txBody>
       </p:sp>
